--- a/HR Employee Analytics Dashboard Presentation.pptx
+++ b/HR Employee Analytics Dashboard Presentation.pptx
@@ -5803,9 +5803,425 @@
           </a:p>
         </p:txBody>
       </p:sp>
+      <p:sp>
+        <p:nvSpPr>
+          <p:cNvPr id="5" name="Shape 2"/>
+          <p:cNvSpPr/>
+          <p:nvPr/>
+        </p:nvSpPr>
+        <p:spPr>
+          <a:xfrm>
+            <a:off x="8732520" y="1005840"/>
+            <a:ext cx="2971800" cy="5074920"/>
+          </a:xfrm>
+          <a:prstGeom prst="roundRect">
+            <a:avLst>
+              <a:gd name="adj" fmla="val 3077"/>
+            </a:avLst>
+          </a:prstGeom>
+          <a:solidFill>
+            <a:srgbClr val="2F3C7E"/>
+          </a:solidFill>
+          <a:ln/>
+        </p:spPr>
+        <p:txBody>
+          <a:bodyPr/>
+          <a:lstStyle/>
+          <a:p>
+            <a:endParaRPr lang="en-IN" b="1"/>
+          </a:p>
+        </p:txBody>
+      </p:sp>
+      <p:sp>
+        <p:nvSpPr>
+          <p:cNvPr id="6" name="Text 3"/>
+          <p:cNvSpPr/>
+          <p:nvPr/>
+        </p:nvSpPr>
+        <p:spPr>
+          <a:xfrm>
+            <a:off x="9006840" y="1150462"/>
+            <a:ext cx="2468880" cy="365760"/>
+          </a:xfrm>
+          <a:prstGeom prst="rect">
+            <a:avLst/>
+          </a:prstGeom>
+          <a:noFill/>
+          <a:ln/>
+        </p:spPr>
+        <p:txBody>
+          <a:bodyPr wrap="square" rtlCol="0" anchor="ctr"/>
+          <a:lstStyle/>
+          <a:p>
+            <a:pPr marL="0" indent="0">
+              <a:buNone/>
+            </a:pPr>
+            <a:r>
+              <a:rPr lang="en-US" sz="1300" b="1" kern="0" spc="100" dirty="0">
+                <a:solidFill>
+                  <a:srgbClr val="CADCE8"/>
+                </a:solidFill>
+                <a:latin typeface="Calibri" pitchFamily="34" charset="0"/>
+                <a:ea typeface="Calibri" pitchFamily="34" charset="-122"/>
+                <a:cs typeface="Calibri" pitchFamily="34" charset="-120"/>
+              </a:rPr>
+              <a:t>WHAT TO NOTICE</a:t>
+            </a:r>
+            <a:endParaRPr lang="en-US" sz="1300" dirty="0"/>
+          </a:p>
+        </p:txBody>
+      </p:sp>
+      <p:sp>
+        <p:nvSpPr>
+          <p:cNvPr id="7" name="Shape 4"/>
+          <p:cNvSpPr/>
+          <p:nvPr/>
+        </p:nvSpPr>
+        <p:spPr>
+          <a:xfrm>
+            <a:off x="9006840" y="1819656"/>
+            <a:ext cx="82296" cy="82296"/>
+          </a:xfrm>
+          <a:prstGeom prst="ellipse">
+            <a:avLst/>
+          </a:prstGeom>
+          <a:solidFill>
+            <a:srgbClr val="990011"/>
+          </a:solidFill>
+          <a:ln/>
+        </p:spPr>
+        <p:txBody>
+          <a:bodyPr/>
+          <a:lstStyle/>
+          <a:p>
+            <a:endParaRPr lang="en-IN"/>
+          </a:p>
+        </p:txBody>
+      </p:sp>
+      <p:sp>
+        <p:nvSpPr>
+          <p:cNvPr id="8" name="Text 5"/>
+          <p:cNvSpPr/>
+          <p:nvPr/>
+        </p:nvSpPr>
+        <p:spPr>
+          <a:xfrm>
+            <a:off x="9189720" y="1439896"/>
+            <a:ext cx="2423160" cy="822960"/>
+          </a:xfrm>
+          <a:prstGeom prst="rect">
+            <a:avLst/>
+          </a:prstGeom>
+          <a:noFill/>
+          <a:ln/>
+        </p:spPr>
+        <p:txBody>
+          <a:bodyPr wrap="square" lIns="0" tIns="0" rIns="0" bIns="0" rtlCol="0" anchor="ctr"/>
+          <a:lstStyle/>
+          <a:p>
+            <a:pPr marL="0" indent="0">
+              <a:buNone/>
+            </a:pPr>
+            <a:r>
+              <a:rPr lang="en-US" sz="1150" b="1" dirty="0">
+                <a:solidFill>
+                  <a:srgbClr val="FCF6F5"/>
+                </a:solidFill>
+                <a:latin typeface="Calibri" pitchFamily="34" charset="0"/>
+                <a:ea typeface="Calibri" pitchFamily="34" charset="-122"/>
+                <a:cs typeface="Calibri" pitchFamily="34" charset="-120"/>
+              </a:rPr>
+              <a:t>KPI cards: Total Employees, Employees Left, Attrition Rate, Average Salary</a:t>
+            </a:r>
+            <a:endParaRPr lang="en-US" sz="1150" b="1" dirty="0"/>
+          </a:p>
+        </p:txBody>
+      </p:sp>
+      <p:sp>
+        <p:nvSpPr>
+          <p:cNvPr id="9" name="Shape 6"/>
+          <p:cNvSpPr/>
+          <p:nvPr/>
+        </p:nvSpPr>
+        <p:spPr>
+          <a:xfrm>
+            <a:off x="9006840" y="2715768"/>
+            <a:ext cx="82296" cy="82296"/>
+          </a:xfrm>
+          <a:prstGeom prst="ellipse">
+            <a:avLst/>
+          </a:prstGeom>
+          <a:solidFill>
+            <a:srgbClr val="990011"/>
+          </a:solidFill>
+          <a:ln/>
+        </p:spPr>
+        <p:txBody>
+          <a:bodyPr/>
+          <a:lstStyle/>
+          <a:p>
+            <a:endParaRPr lang="en-IN"/>
+          </a:p>
+        </p:txBody>
+      </p:sp>
+      <p:sp>
+        <p:nvSpPr>
+          <p:cNvPr id="10" name="Text 7"/>
+          <p:cNvSpPr/>
+          <p:nvPr/>
+        </p:nvSpPr>
+        <p:spPr>
+          <a:xfrm>
+            <a:off x="9189720" y="2331720"/>
+            <a:ext cx="2423160" cy="822960"/>
+          </a:xfrm>
+          <a:prstGeom prst="rect">
+            <a:avLst/>
+          </a:prstGeom>
+          <a:noFill/>
+          <a:ln/>
+        </p:spPr>
+        <p:txBody>
+          <a:bodyPr wrap="square" lIns="0" tIns="0" rIns="0" bIns="0" rtlCol="0" anchor="ctr"/>
+          <a:lstStyle/>
+          <a:p>
+            <a:pPr marL="0" indent="0">
+              <a:buNone/>
+            </a:pPr>
+            <a:r>
+              <a:rPr lang="en-US" sz="1150" b="1" dirty="0">
+                <a:solidFill>
+                  <a:srgbClr val="FCF6F5"/>
+                </a:solidFill>
+                <a:latin typeface="Calibri" pitchFamily="34" charset="0"/>
+                <a:ea typeface="Calibri" pitchFamily="34" charset="-122"/>
+                <a:cs typeface="Calibri" pitchFamily="34" charset="-120"/>
+              </a:rPr>
+              <a:t>Average Salary by Department and by Job Role</a:t>
+            </a:r>
+            <a:endParaRPr lang="en-US" sz="1150" b="1" dirty="0"/>
+          </a:p>
+        </p:txBody>
+      </p:sp>
+      <p:sp>
+        <p:nvSpPr>
+          <p:cNvPr id="11" name="Shape 8"/>
+          <p:cNvSpPr/>
+          <p:nvPr/>
+        </p:nvSpPr>
+        <p:spPr>
+          <a:xfrm>
+            <a:off x="9006840" y="3611880"/>
+            <a:ext cx="82296" cy="82296"/>
+          </a:xfrm>
+          <a:prstGeom prst="ellipse">
+            <a:avLst/>
+          </a:prstGeom>
+          <a:solidFill>
+            <a:srgbClr val="990011"/>
+          </a:solidFill>
+          <a:ln/>
+        </p:spPr>
+        <p:txBody>
+          <a:bodyPr/>
+          <a:lstStyle/>
+          <a:p>
+            <a:endParaRPr lang="en-IN"/>
+          </a:p>
+        </p:txBody>
+      </p:sp>
+      <p:sp>
+        <p:nvSpPr>
+          <p:cNvPr id="12" name="Text 9"/>
+          <p:cNvSpPr/>
+          <p:nvPr/>
+        </p:nvSpPr>
+        <p:spPr>
+          <a:xfrm>
+            <a:off x="9189720" y="3246120"/>
+            <a:ext cx="2423160" cy="822960"/>
+          </a:xfrm>
+          <a:prstGeom prst="rect">
+            <a:avLst/>
+          </a:prstGeom>
+          <a:noFill/>
+          <a:ln/>
+        </p:spPr>
+        <p:txBody>
+          <a:bodyPr wrap="square" lIns="0" tIns="0" rIns="0" bIns="0" rtlCol="0" anchor="ctr"/>
+          <a:lstStyle/>
+          <a:p>
+            <a:pPr marL="0" indent="0">
+              <a:buNone/>
+            </a:pPr>
+            <a:r>
+              <a:rPr lang="en-US" sz="1150" b="1" dirty="0">
+                <a:solidFill>
+                  <a:srgbClr val="FCF6F5"/>
+                </a:solidFill>
+                <a:latin typeface="Calibri" pitchFamily="34" charset="0"/>
+                <a:ea typeface="Calibri" pitchFamily="34" charset="-122"/>
+                <a:cs typeface="Calibri" pitchFamily="34" charset="-120"/>
+              </a:rPr>
+              <a:t>Employees Left by Job Role and by Department</a:t>
+            </a:r>
+            <a:endParaRPr lang="en-US" sz="1150" b="1" dirty="0"/>
+          </a:p>
+        </p:txBody>
+      </p:sp>
+      <p:sp>
+        <p:nvSpPr>
+          <p:cNvPr id="13" name="Shape 10"/>
+          <p:cNvSpPr/>
+          <p:nvPr/>
+        </p:nvSpPr>
+        <p:spPr>
+          <a:xfrm>
+            <a:off x="9006840" y="4507992"/>
+            <a:ext cx="82296" cy="82296"/>
+          </a:xfrm>
+          <a:prstGeom prst="ellipse">
+            <a:avLst/>
+          </a:prstGeom>
+          <a:solidFill>
+            <a:srgbClr val="990011"/>
+          </a:solidFill>
+          <a:ln/>
+        </p:spPr>
+        <p:txBody>
+          <a:bodyPr/>
+          <a:lstStyle/>
+          <a:p>
+            <a:endParaRPr lang="en-IN"/>
+          </a:p>
+        </p:txBody>
+      </p:sp>
+      <p:sp>
+        <p:nvSpPr>
+          <p:cNvPr id="14" name="Text 11"/>
+          <p:cNvSpPr/>
+          <p:nvPr/>
+        </p:nvSpPr>
+        <p:spPr>
+          <a:xfrm>
+            <a:off x="9242531" y="4137660"/>
+            <a:ext cx="2423160" cy="822960"/>
+          </a:xfrm>
+          <a:prstGeom prst="rect">
+            <a:avLst/>
+          </a:prstGeom>
+          <a:noFill/>
+          <a:ln/>
+        </p:spPr>
+        <p:txBody>
+          <a:bodyPr wrap="square" lIns="0" tIns="0" rIns="0" bIns="0" rtlCol="0" anchor="ctr"/>
+          <a:lstStyle/>
+          <a:p>
+            <a:pPr marL="0" indent="0">
+              <a:buNone/>
+            </a:pPr>
+            <a:r>
+              <a:rPr lang="en-US" sz="1150" dirty="0">
+                <a:solidFill>
+                  <a:srgbClr val="FCF6F5"/>
+                </a:solidFill>
+                <a:latin typeface="Calibri" pitchFamily="34" charset="0"/>
+                <a:ea typeface="Calibri" pitchFamily="34" charset="-122"/>
+                <a:cs typeface="Calibri" pitchFamily="34" charset="-120"/>
+              </a:rPr>
+              <a:t>Age distribution and Salary Band split</a:t>
+            </a:r>
+            <a:endParaRPr lang="en-US" sz="1150" dirty="0"/>
+          </a:p>
+        </p:txBody>
+      </p:sp>
+      <p:sp>
+        <p:nvSpPr>
+          <p:cNvPr id="15" name="Text 12"/>
+          <p:cNvSpPr/>
+          <p:nvPr/>
+        </p:nvSpPr>
+        <p:spPr>
+          <a:xfrm>
+            <a:off x="11521440" y="6492240"/>
+            <a:ext cx="457200" cy="274320"/>
+          </a:xfrm>
+          <a:prstGeom prst="rect">
+            <a:avLst/>
+          </a:prstGeom>
+          <a:noFill/>
+          <a:ln/>
+        </p:spPr>
+        <p:txBody>
+          <a:bodyPr wrap="square" rtlCol="0" anchor="ctr"/>
+          <a:lstStyle/>
+          <a:p>
+            <a:pPr marL="0" indent="0" algn="r">
+              <a:buNone/>
+            </a:pPr>
+            <a:r>
+              <a:rPr lang="en-US" sz="1000" dirty="0">
+                <a:solidFill>
+                  <a:srgbClr val="6B6B6B"/>
+                </a:solidFill>
+                <a:latin typeface="Calibri" pitchFamily="34" charset="0"/>
+                <a:ea typeface="Calibri" pitchFamily="34" charset="-122"/>
+                <a:cs typeface="Calibri" pitchFamily="34" charset="-120"/>
+              </a:rPr>
+              <a:t>5</a:t>
+            </a:r>
+            <a:endParaRPr lang="en-US" sz="1000" dirty="0"/>
+          </a:p>
+        </p:txBody>
+      </p:sp>
+      <p:sp>
+        <p:nvSpPr>
+          <p:cNvPr id="16" name="Text 13"/>
+          <p:cNvSpPr/>
+          <p:nvPr/>
+        </p:nvSpPr>
+        <p:spPr>
+          <a:xfrm>
+            <a:off x="457200" y="6492240"/>
+            <a:ext cx="5486400" cy="274320"/>
+          </a:xfrm>
+          <a:prstGeom prst="rect">
+            <a:avLst/>
+          </a:prstGeom>
+          <a:noFill/>
+          <a:ln/>
+        </p:spPr>
+        <p:txBody>
+          <a:bodyPr wrap="square" rtlCol="0" anchor="ctr"/>
+          <a:lstStyle/>
+          <a:p>
+            <a:pPr marL="0" indent="0">
+              <a:buNone/>
+            </a:pPr>
+            <a:r>
+              <a:rPr lang="en-US" sz="1000" dirty="0">
+                <a:solidFill>
+                  <a:srgbClr val="6B6B6B"/>
+                </a:solidFill>
+                <a:latin typeface="Calibri" pitchFamily="34" charset="0"/>
+                <a:ea typeface="Calibri" pitchFamily="34" charset="-122"/>
+                <a:cs typeface="Calibri" pitchFamily="34" charset="-120"/>
+              </a:rPr>
+              <a:t>HR Employee Analytics Dashboard</a:t>
+            </a:r>
+            <a:endParaRPr lang="en-US" sz="1000" dirty="0"/>
+          </a:p>
+        </p:txBody>
+      </p:sp>
       <p:pic>
         <p:nvPicPr>
-          <p:cNvPr id="4" name="Image 0" descr="images/dash1.png"/>
+          <p:cNvPr id="18" name="Picture 17">
+            <a:extLst>
+              <a:ext uri="{FF2B5EF4-FFF2-40B4-BE49-F238E27FC236}">
+                <a16:creationId xmlns:a16="http://schemas.microsoft.com/office/drawing/2014/main" id="{740AC185-CB98-6439-FEA2-EDE4EFD59C9A}"/>
+              </a:ext>
+            </a:extLst>
+          </p:cNvPr>
           <p:cNvPicPr>
             <a:picLocks noChangeAspect="1"/>
           </p:cNvPicPr>
@@ -5819,424 +6235,14 @@
         </p:blipFill>
         <p:spPr>
           <a:xfrm>
-            <a:off x="502920" y="1097280"/>
-            <a:ext cx="7955280" cy="4475604"/>
+            <a:off x="526309" y="1150462"/>
+            <a:ext cx="7880574" cy="4382591"/>
           </a:xfrm>
           <a:prstGeom prst="rect">
             <a:avLst/>
           </a:prstGeom>
         </p:spPr>
       </p:pic>
-      <p:sp>
-        <p:nvSpPr>
-          <p:cNvPr id="5" name="Shape 2"/>
-          <p:cNvSpPr/>
-          <p:nvPr/>
-        </p:nvSpPr>
-        <p:spPr>
-          <a:xfrm>
-            <a:off x="8732520" y="1005840"/>
-            <a:ext cx="2971800" cy="5074920"/>
-          </a:xfrm>
-          <a:prstGeom prst="roundRect">
-            <a:avLst>
-              <a:gd name="adj" fmla="val 3077"/>
-            </a:avLst>
-          </a:prstGeom>
-          <a:solidFill>
-            <a:srgbClr val="2F3C7E"/>
-          </a:solidFill>
-          <a:ln/>
-        </p:spPr>
-        <p:txBody>
-          <a:bodyPr/>
-          <a:lstStyle/>
-          <a:p>
-            <a:endParaRPr lang="en-IN" b="1"/>
-          </a:p>
-        </p:txBody>
-      </p:sp>
-      <p:sp>
-        <p:nvSpPr>
-          <p:cNvPr id="6" name="Text 3"/>
-          <p:cNvSpPr/>
-          <p:nvPr/>
-        </p:nvSpPr>
-        <p:spPr>
-          <a:xfrm>
-            <a:off x="9006840" y="1150462"/>
-            <a:ext cx="2468880" cy="365760"/>
-          </a:xfrm>
-          <a:prstGeom prst="rect">
-            <a:avLst/>
-          </a:prstGeom>
-          <a:noFill/>
-          <a:ln/>
-        </p:spPr>
-        <p:txBody>
-          <a:bodyPr wrap="square" rtlCol="0" anchor="ctr"/>
-          <a:lstStyle/>
-          <a:p>
-            <a:pPr marL="0" indent="0">
-              <a:buNone/>
-            </a:pPr>
-            <a:r>
-              <a:rPr lang="en-US" sz="1300" b="1" kern="0" spc="100" dirty="0">
-                <a:solidFill>
-                  <a:srgbClr val="CADCE8"/>
-                </a:solidFill>
-                <a:latin typeface="Calibri" pitchFamily="34" charset="0"/>
-                <a:ea typeface="Calibri" pitchFamily="34" charset="-122"/>
-                <a:cs typeface="Calibri" pitchFamily="34" charset="-120"/>
-              </a:rPr>
-              <a:t>WHAT TO NOTICE</a:t>
-            </a:r>
-            <a:endParaRPr lang="en-US" sz="1300" dirty="0"/>
-          </a:p>
-        </p:txBody>
-      </p:sp>
-      <p:sp>
-        <p:nvSpPr>
-          <p:cNvPr id="7" name="Shape 4"/>
-          <p:cNvSpPr/>
-          <p:nvPr/>
-        </p:nvSpPr>
-        <p:spPr>
-          <a:xfrm>
-            <a:off x="9006840" y="1819656"/>
-            <a:ext cx="82296" cy="82296"/>
-          </a:xfrm>
-          <a:prstGeom prst="ellipse">
-            <a:avLst/>
-          </a:prstGeom>
-          <a:solidFill>
-            <a:srgbClr val="990011"/>
-          </a:solidFill>
-          <a:ln/>
-        </p:spPr>
-        <p:txBody>
-          <a:bodyPr/>
-          <a:lstStyle/>
-          <a:p>
-            <a:endParaRPr lang="en-IN"/>
-          </a:p>
-        </p:txBody>
-      </p:sp>
-      <p:sp>
-        <p:nvSpPr>
-          <p:cNvPr id="8" name="Text 5"/>
-          <p:cNvSpPr/>
-          <p:nvPr/>
-        </p:nvSpPr>
-        <p:spPr>
-          <a:xfrm>
-            <a:off x="9189720" y="1439896"/>
-            <a:ext cx="2423160" cy="822960"/>
-          </a:xfrm>
-          <a:prstGeom prst="rect">
-            <a:avLst/>
-          </a:prstGeom>
-          <a:noFill/>
-          <a:ln/>
-        </p:spPr>
-        <p:txBody>
-          <a:bodyPr wrap="square" lIns="0" tIns="0" rIns="0" bIns="0" rtlCol="0" anchor="ctr"/>
-          <a:lstStyle/>
-          <a:p>
-            <a:pPr marL="0" indent="0">
-              <a:buNone/>
-            </a:pPr>
-            <a:r>
-              <a:rPr lang="en-US" sz="1150" b="1" dirty="0">
-                <a:solidFill>
-                  <a:srgbClr val="FCF6F5"/>
-                </a:solidFill>
-                <a:latin typeface="Calibri" pitchFamily="34" charset="0"/>
-                <a:ea typeface="Calibri" pitchFamily="34" charset="-122"/>
-                <a:cs typeface="Calibri" pitchFamily="34" charset="-120"/>
-              </a:rPr>
-              <a:t>KPI cards: Total Employees, Employees Left, Attrition Rate, Average Salary</a:t>
-            </a:r>
-            <a:endParaRPr lang="en-US" sz="1150" b="1" dirty="0"/>
-          </a:p>
-        </p:txBody>
-      </p:sp>
-      <p:sp>
-        <p:nvSpPr>
-          <p:cNvPr id="9" name="Shape 6"/>
-          <p:cNvSpPr/>
-          <p:nvPr/>
-        </p:nvSpPr>
-        <p:spPr>
-          <a:xfrm>
-            <a:off x="9006840" y="2715768"/>
-            <a:ext cx="82296" cy="82296"/>
-          </a:xfrm>
-          <a:prstGeom prst="ellipse">
-            <a:avLst/>
-          </a:prstGeom>
-          <a:solidFill>
-            <a:srgbClr val="990011"/>
-          </a:solidFill>
-          <a:ln/>
-        </p:spPr>
-        <p:txBody>
-          <a:bodyPr/>
-          <a:lstStyle/>
-          <a:p>
-            <a:endParaRPr lang="en-IN"/>
-          </a:p>
-        </p:txBody>
-      </p:sp>
-      <p:sp>
-        <p:nvSpPr>
-          <p:cNvPr id="10" name="Text 7"/>
-          <p:cNvSpPr/>
-          <p:nvPr/>
-        </p:nvSpPr>
-        <p:spPr>
-          <a:xfrm>
-            <a:off x="9189720" y="2331720"/>
-            <a:ext cx="2423160" cy="822960"/>
-          </a:xfrm>
-          <a:prstGeom prst="rect">
-            <a:avLst/>
-          </a:prstGeom>
-          <a:noFill/>
-          <a:ln/>
-        </p:spPr>
-        <p:txBody>
-          <a:bodyPr wrap="square" lIns="0" tIns="0" rIns="0" bIns="0" rtlCol="0" anchor="ctr"/>
-          <a:lstStyle/>
-          <a:p>
-            <a:pPr marL="0" indent="0">
-              <a:buNone/>
-            </a:pPr>
-            <a:r>
-              <a:rPr lang="en-US" sz="1150" b="1" dirty="0">
-                <a:solidFill>
-                  <a:srgbClr val="FCF6F5"/>
-                </a:solidFill>
-                <a:latin typeface="Calibri" pitchFamily="34" charset="0"/>
-                <a:ea typeface="Calibri" pitchFamily="34" charset="-122"/>
-                <a:cs typeface="Calibri" pitchFamily="34" charset="-120"/>
-              </a:rPr>
-              <a:t>Average Salary by Department and by Job Role</a:t>
-            </a:r>
-            <a:endParaRPr lang="en-US" sz="1150" b="1" dirty="0"/>
-          </a:p>
-        </p:txBody>
-      </p:sp>
-      <p:sp>
-        <p:nvSpPr>
-          <p:cNvPr id="11" name="Shape 8"/>
-          <p:cNvSpPr/>
-          <p:nvPr/>
-        </p:nvSpPr>
-        <p:spPr>
-          <a:xfrm>
-            <a:off x="9006840" y="3611880"/>
-            <a:ext cx="82296" cy="82296"/>
-          </a:xfrm>
-          <a:prstGeom prst="ellipse">
-            <a:avLst/>
-          </a:prstGeom>
-          <a:solidFill>
-            <a:srgbClr val="990011"/>
-          </a:solidFill>
-          <a:ln/>
-        </p:spPr>
-        <p:txBody>
-          <a:bodyPr/>
-          <a:lstStyle/>
-          <a:p>
-            <a:endParaRPr lang="en-IN"/>
-          </a:p>
-        </p:txBody>
-      </p:sp>
-      <p:sp>
-        <p:nvSpPr>
-          <p:cNvPr id="12" name="Text 9"/>
-          <p:cNvSpPr/>
-          <p:nvPr/>
-        </p:nvSpPr>
-        <p:spPr>
-          <a:xfrm>
-            <a:off x="9189720" y="3246120"/>
-            <a:ext cx="2423160" cy="822960"/>
-          </a:xfrm>
-          <a:prstGeom prst="rect">
-            <a:avLst/>
-          </a:prstGeom>
-          <a:noFill/>
-          <a:ln/>
-        </p:spPr>
-        <p:txBody>
-          <a:bodyPr wrap="square" lIns="0" tIns="0" rIns="0" bIns="0" rtlCol="0" anchor="ctr"/>
-          <a:lstStyle/>
-          <a:p>
-            <a:pPr marL="0" indent="0">
-              <a:buNone/>
-            </a:pPr>
-            <a:r>
-              <a:rPr lang="en-US" sz="1150" b="1" dirty="0">
-                <a:solidFill>
-                  <a:srgbClr val="FCF6F5"/>
-                </a:solidFill>
-                <a:latin typeface="Calibri" pitchFamily="34" charset="0"/>
-                <a:ea typeface="Calibri" pitchFamily="34" charset="-122"/>
-                <a:cs typeface="Calibri" pitchFamily="34" charset="-120"/>
-              </a:rPr>
-              <a:t>Employees Left by Job Role and by Department</a:t>
-            </a:r>
-            <a:endParaRPr lang="en-US" sz="1150" b="1" dirty="0"/>
-          </a:p>
-        </p:txBody>
-      </p:sp>
-      <p:sp>
-        <p:nvSpPr>
-          <p:cNvPr id="13" name="Shape 10"/>
-          <p:cNvSpPr/>
-          <p:nvPr/>
-        </p:nvSpPr>
-        <p:spPr>
-          <a:xfrm>
-            <a:off x="9006840" y="4507992"/>
-            <a:ext cx="82296" cy="82296"/>
-          </a:xfrm>
-          <a:prstGeom prst="ellipse">
-            <a:avLst/>
-          </a:prstGeom>
-          <a:solidFill>
-            <a:srgbClr val="990011"/>
-          </a:solidFill>
-          <a:ln/>
-        </p:spPr>
-        <p:txBody>
-          <a:bodyPr/>
-          <a:lstStyle/>
-          <a:p>
-            <a:endParaRPr lang="en-IN"/>
-          </a:p>
-        </p:txBody>
-      </p:sp>
-      <p:sp>
-        <p:nvSpPr>
-          <p:cNvPr id="14" name="Text 11"/>
-          <p:cNvSpPr/>
-          <p:nvPr/>
-        </p:nvSpPr>
-        <p:spPr>
-          <a:xfrm>
-            <a:off x="9242531" y="4137660"/>
-            <a:ext cx="2423160" cy="822960"/>
-          </a:xfrm>
-          <a:prstGeom prst="rect">
-            <a:avLst/>
-          </a:prstGeom>
-          <a:noFill/>
-          <a:ln/>
-        </p:spPr>
-        <p:txBody>
-          <a:bodyPr wrap="square" lIns="0" tIns="0" rIns="0" bIns="0" rtlCol="0" anchor="ctr"/>
-          <a:lstStyle/>
-          <a:p>
-            <a:pPr marL="0" indent="0">
-              <a:buNone/>
-            </a:pPr>
-            <a:r>
-              <a:rPr lang="en-US" sz="1150" dirty="0">
-                <a:solidFill>
-                  <a:srgbClr val="FCF6F5"/>
-                </a:solidFill>
-                <a:latin typeface="Calibri" pitchFamily="34" charset="0"/>
-                <a:ea typeface="Calibri" pitchFamily="34" charset="-122"/>
-                <a:cs typeface="Calibri" pitchFamily="34" charset="-120"/>
-              </a:rPr>
-              <a:t>Age distribution and Salary Band split</a:t>
-            </a:r>
-            <a:endParaRPr lang="en-US" sz="1150" dirty="0"/>
-          </a:p>
-        </p:txBody>
-      </p:sp>
-      <p:sp>
-        <p:nvSpPr>
-          <p:cNvPr id="15" name="Text 12"/>
-          <p:cNvSpPr/>
-          <p:nvPr/>
-        </p:nvSpPr>
-        <p:spPr>
-          <a:xfrm>
-            <a:off x="11521440" y="6492240"/>
-            <a:ext cx="457200" cy="274320"/>
-          </a:xfrm>
-          <a:prstGeom prst="rect">
-            <a:avLst/>
-          </a:prstGeom>
-          <a:noFill/>
-          <a:ln/>
-        </p:spPr>
-        <p:txBody>
-          <a:bodyPr wrap="square" rtlCol="0" anchor="ctr"/>
-          <a:lstStyle/>
-          <a:p>
-            <a:pPr marL="0" indent="0" algn="r">
-              <a:buNone/>
-            </a:pPr>
-            <a:r>
-              <a:rPr lang="en-US" sz="1000" dirty="0">
-                <a:solidFill>
-                  <a:srgbClr val="6B6B6B"/>
-                </a:solidFill>
-                <a:latin typeface="Calibri" pitchFamily="34" charset="0"/>
-                <a:ea typeface="Calibri" pitchFamily="34" charset="-122"/>
-                <a:cs typeface="Calibri" pitchFamily="34" charset="-120"/>
-              </a:rPr>
-              <a:t>5</a:t>
-            </a:r>
-            <a:endParaRPr lang="en-US" sz="1000" dirty="0"/>
-          </a:p>
-        </p:txBody>
-      </p:sp>
-      <p:sp>
-        <p:nvSpPr>
-          <p:cNvPr id="16" name="Text 13"/>
-          <p:cNvSpPr/>
-          <p:nvPr/>
-        </p:nvSpPr>
-        <p:spPr>
-          <a:xfrm>
-            <a:off x="457200" y="6492240"/>
-            <a:ext cx="5486400" cy="274320"/>
-          </a:xfrm>
-          <a:prstGeom prst="rect">
-            <a:avLst/>
-          </a:prstGeom>
-          <a:noFill/>
-          <a:ln/>
-        </p:spPr>
-        <p:txBody>
-          <a:bodyPr wrap="square" rtlCol="0" anchor="ctr"/>
-          <a:lstStyle/>
-          <a:p>
-            <a:pPr marL="0" indent="0">
-              <a:buNone/>
-            </a:pPr>
-            <a:r>
-              <a:rPr lang="en-US" sz="1000" dirty="0">
-                <a:solidFill>
-                  <a:srgbClr val="6B6B6B"/>
-                </a:solidFill>
-                <a:latin typeface="Calibri" pitchFamily="34" charset="0"/>
-                <a:ea typeface="Calibri" pitchFamily="34" charset="-122"/>
-                <a:cs typeface="Calibri" pitchFamily="34" charset="-120"/>
-              </a:rPr>
-              <a:t>HR Employee Analytics Dashboard</a:t>
-            </a:r>
-            <a:endParaRPr lang="en-US" sz="1000" dirty="0"/>
-          </a:p>
-        </p:txBody>
-      </p:sp>
     </p:spTree>
   </p:cSld>
   <p:clrMapOvr>
@@ -6350,9 +6356,425 @@
           </a:p>
         </p:txBody>
       </p:sp>
+      <p:sp>
+        <p:nvSpPr>
+          <p:cNvPr id="5" name="Shape 2"/>
+          <p:cNvSpPr/>
+          <p:nvPr/>
+        </p:nvSpPr>
+        <p:spPr>
+          <a:xfrm>
+            <a:off x="8732520" y="1005840"/>
+            <a:ext cx="2971800" cy="5074920"/>
+          </a:xfrm>
+          <a:prstGeom prst="roundRect">
+            <a:avLst>
+              <a:gd name="adj" fmla="val 3077"/>
+            </a:avLst>
+          </a:prstGeom>
+          <a:solidFill>
+            <a:srgbClr val="2F3C7E"/>
+          </a:solidFill>
+          <a:ln/>
+        </p:spPr>
+        <p:txBody>
+          <a:bodyPr/>
+          <a:lstStyle/>
+          <a:p>
+            <a:endParaRPr lang="en-IN"/>
+          </a:p>
+        </p:txBody>
+      </p:sp>
+      <p:sp>
+        <p:nvSpPr>
+          <p:cNvPr id="6" name="Text 3"/>
+          <p:cNvSpPr/>
+          <p:nvPr/>
+        </p:nvSpPr>
+        <p:spPr>
+          <a:xfrm>
+            <a:off x="9006840" y="1131800"/>
+            <a:ext cx="2468880" cy="365760"/>
+          </a:xfrm>
+          <a:prstGeom prst="rect">
+            <a:avLst/>
+          </a:prstGeom>
+          <a:noFill/>
+          <a:ln/>
+        </p:spPr>
+        <p:txBody>
+          <a:bodyPr wrap="square" rtlCol="0" anchor="ctr"/>
+          <a:lstStyle/>
+          <a:p>
+            <a:pPr marL="0" indent="0">
+              <a:buNone/>
+            </a:pPr>
+            <a:r>
+              <a:rPr lang="en-US" sz="1300" b="1" kern="0" spc="100" dirty="0">
+                <a:solidFill>
+                  <a:srgbClr val="CADCE8"/>
+                </a:solidFill>
+                <a:latin typeface="Calibri" pitchFamily="34" charset="0"/>
+                <a:ea typeface="Calibri" pitchFamily="34" charset="-122"/>
+                <a:cs typeface="Calibri" pitchFamily="34" charset="-120"/>
+              </a:rPr>
+              <a:t>WHAT TO NOTICE</a:t>
+            </a:r>
+            <a:endParaRPr lang="en-US" sz="1300" dirty="0"/>
+          </a:p>
+        </p:txBody>
+      </p:sp>
+      <p:sp>
+        <p:nvSpPr>
+          <p:cNvPr id="7" name="Shape 4"/>
+          <p:cNvSpPr/>
+          <p:nvPr/>
+        </p:nvSpPr>
+        <p:spPr>
+          <a:xfrm>
+            <a:off x="9006840" y="1819656"/>
+            <a:ext cx="82296" cy="82296"/>
+          </a:xfrm>
+          <a:prstGeom prst="ellipse">
+            <a:avLst/>
+          </a:prstGeom>
+          <a:solidFill>
+            <a:srgbClr val="990011"/>
+          </a:solidFill>
+          <a:ln/>
+        </p:spPr>
+        <p:txBody>
+          <a:bodyPr/>
+          <a:lstStyle/>
+          <a:p>
+            <a:endParaRPr lang="en-IN"/>
+          </a:p>
+        </p:txBody>
+      </p:sp>
+      <p:sp>
+        <p:nvSpPr>
+          <p:cNvPr id="8" name="Text 5"/>
+          <p:cNvSpPr/>
+          <p:nvPr/>
+        </p:nvSpPr>
+        <p:spPr>
+          <a:xfrm>
+            <a:off x="9189720" y="1439904"/>
+            <a:ext cx="2423160" cy="822960"/>
+          </a:xfrm>
+          <a:prstGeom prst="rect">
+            <a:avLst/>
+          </a:prstGeom>
+          <a:noFill/>
+          <a:ln/>
+        </p:spPr>
+        <p:txBody>
+          <a:bodyPr wrap="square" lIns="0" tIns="0" rIns="0" bIns="0" rtlCol="0" anchor="ctr"/>
+          <a:lstStyle/>
+          <a:p>
+            <a:pPr marL="0" indent="0">
+              <a:buNone/>
+            </a:pPr>
+            <a:r>
+              <a:rPr lang="en-US" sz="1150" b="1" dirty="0">
+                <a:solidFill>
+                  <a:srgbClr val="FCF6F5"/>
+                </a:solidFill>
+                <a:latin typeface="Calibri" pitchFamily="34" charset="0"/>
+                <a:ea typeface="Calibri" pitchFamily="34" charset="-122"/>
+                <a:cs typeface="Calibri" pitchFamily="34" charset="-120"/>
+              </a:rPr>
+              <a:t>Employee Details table with drill-through to individual records</a:t>
+            </a:r>
+            <a:endParaRPr lang="en-US" sz="1150" b="1" dirty="0"/>
+          </a:p>
+        </p:txBody>
+      </p:sp>
+      <p:sp>
+        <p:nvSpPr>
+          <p:cNvPr id="9" name="Shape 6"/>
+          <p:cNvSpPr/>
+          <p:nvPr/>
+        </p:nvSpPr>
+        <p:spPr>
+          <a:xfrm>
+            <a:off x="9006840" y="2715768"/>
+            <a:ext cx="82296" cy="82296"/>
+          </a:xfrm>
+          <a:prstGeom prst="ellipse">
+            <a:avLst/>
+          </a:prstGeom>
+          <a:solidFill>
+            <a:srgbClr val="990011"/>
+          </a:solidFill>
+          <a:ln/>
+        </p:spPr>
+        <p:txBody>
+          <a:bodyPr/>
+          <a:lstStyle/>
+          <a:p>
+            <a:endParaRPr lang="en-IN"/>
+          </a:p>
+        </p:txBody>
+      </p:sp>
+      <p:sp>
+        <p:nvSpPr>
+          <p:cNvPr id="10" name="Text 7"/>
+          <p:cNvSpPr/>
+          <p:nvPr/>
+        </p:nvSpPr>
+        <p:spPr>
+          <a:xfrm>
+            <a:off x="9189720" y="2336016"/>
+            <a:ext cx="2423160" cy="822960"/>
+          </a:xfrm>
+          <a:prstGeom prst="rect">
+            <a:avLst/>
+          </a:prstGeom>
+          <a:noFill/>
+          <a:ln/>
+        </p:spPr>
+        <p:txBody>
+          <a:bodyPr wrap="square" lIns="0" tIns="0" rIns="0" bIns="0" rtlCol="0" anchor="ctr"/>
+          <a:lstStyle/>
+          <a:p>
+            <a:pPr marL="0" indent="0">
+              <a:buNone/>
+            </a:pPr>
+            <a:r>
+              <a:rPr lang="en-US" sz="1150" b="1" dirty="0">
+                <a:solidFill>
+                  <a:srgbClr val="FCF6F5"/>
+                </a:solidFill>
+                <a:latin typeface="Calibri" pitchFamily="34" charset="0"/>
+                <a:ea typeface="Calibri" pitchFamily="34" charset="-122"/>
+                <a:cs typeface="Calibri" pitchFamily="34" charset="-120"/>
+              </a:rPr>
+              <a:t>Average Salary by Job Role</a:t>
+            </a:r>
+            <a:endParaRPr lang="en-US" sz="1150" b="1" dirty="0"/>
+          </a:p>
+        </p:txBody>
+      </p:sp>
+      <p:sp>
+        <p:nvSpPr>
+          <p:cNvPr id="11" name="Shape 8"/>
+          <p:cNvSpPr/>
+          <p:nvPr/>
+        </p:nvSpPr>
+        <p:spPr>
+          <a:xfrm>
+            <a:off x="9006840" y="3611880"/>
+            <a:ext cx="82296" cy="82296"/>
+          </a:xfrm>
+          <a:prstGeom prst="ellipse">
+            <a:avLst/>
+          </a:prstGeom>
+          <a:solidFill>
+            <a:srgbClr val="990011"/>
+          </a:solidFill>
+          <a:ln/>
+        </p:spPr>
+        <p:txBody>
+          <a:bodyPr/>
+          <a:lstStyle/>
+          <a:p>
+            <a:endParaRPr lang="en-IN"/>
+          </a:p>
+        </p:txBody>
+      </p:sp>
+      <p:sp>
+        <p:nvSpPr>
+          <p:cNvPr id="12" name="Text 9"/>
+          <p:cNvSpPr/>
+          <p:nvPr/>
+        </p:nvSpPr>
+        <p:spPr>
+          <a:xfrm>
+            <a:off x="9189720" y="3232128"/>
+            <a:ext cx="2423160" cy="822960"/>
+          </a:xfrm>
+          <a:prstGeom prst="rect">
+            <a:avLst/>
+          </a:prstGeom>
+          <a:noFill/>
+          <a:ln/>
+        </p:spPr>
+        <p:txBody>
+          <a:bodyPr wrap="square" lIns="0" tIns="0" rIns="0" bIns="0" rtlCol="0" anchor="ctr"/>
+          <a:lstStyle/>
+          <a:p>
+            <a:pPr marL="0" indent="0">
+              <a:buNone/>
+            </a:pPr>
+            <a:r>
+              <a:rPr lang="en-US" sz="1150" b="1" dirty="0">
+                <a:solidFill>
+                  <a:srgbClr val="FCF6F5"/>
+                </a:solidFill>
+                <a:latin typeface="Calibri" pitchFamily="34" charset="0"/>
+                <a:ea typeface="Calibri" pitchFamily="34" charset="-122"/>
+                <a:cs typeface="Calibri" pitchFamily="34" charset="-120"/>
+              </a:rPr>
+              <a:t>Total Employees by Job Satisfaction</a:t>
+            </a:r>
+            <a:endParaRPr lang="en-US" sz="1150" b="1" dirty="0"/>
+          </a:p>
+        </p:txBody>
+      </p:sp>
+      <p:sp>
+        <p:nvSpPr>
+          <p:cNvPr id="13" name="Shape 10"/>
+          <p:cNvSpPr/>
+          <p:nvPr/>
+        </p:nvSpPr>
+        <p:spPr>
+          <a:xfrm>
+            <a:off x="9006840" y="4507992"/>
+            <a:ext cx="82296" cy="82296"/>
+          </a:xfrm>
+          <a:prstGeom prst="ellipse">
+            <a:avLst/>
+          </a:prstGeom>
+          <a:solidFill>
+            <a:srgbClr val="990011"/>
+          </a:solidFill>
+          <a:ln/>
+        </p:spPr>
+        <p:txBody>
+          <a:bodyPr/>
+          <a:lstStyle/>
+          <a:p>
+            <a:endParaRPr lang="en-IN"/>
+          </a:p>
+        </p:txBody>
+      </p:sp>
+      <p:sp>
+        <p:nvSpPr>
+          <p:cNvPr id="14" name="Text 11"/>
+          <p:cNvSpPr/>
+          <p:nvPr/>
+        </p:nvSpPr>
+        <p:spPr>
+          <a:xfrm>
+            <a:off x="9189720" y="4128240"/>
+            <a:ext cx="2423160" cy="822960"/>
+          </a:xfrm>
+          <a:prstGeom prst="rect">
+            <a:avLst/>
+          </a:prstGeom>
+          <a:noFill/>
+          <a:ln/>
+        </p:spPr>
+        <p:txBody>
+          <a:bodyPr wrap="square" lIns="0" tIns="0" rIns="0" bIns="0" rtlCol="0" anchor="ctr"/>
+          <a:lstStyle/>
+          <a:p>
+            <a:pPr marL="0" indent="0">
+              <a:buNone/>
+            </a:pPr>
+            <a:r>
+              <a:rPr lang="en-US" sz="1150" b="1" dirty="0">
+                <a:solidFill>
+                  <a:srgbClr val="FCF6F5"/>
+                </a:solidFill>
+                <a:latin typeface="Calibri" pitchFamily="34" charset="0"/>
+                <a:ea typeface="Calibri" pitchFamily="34" charset="-122"/>
+                <a:cs typeface="Calibri" pitchFamily="34" charset="-120"/>
+              </a:rPr>
+              <a:t>Total Employees by Company Tenure Group</a:t>
+            </a:r>
+            <a:endParaRPr lang="en-US" sz="1150" b="1" dirty="0"/>
+          </a:p>
+        </p:txBody>
+      </p:sp>
+      <p:sp>
+        <p:nvSpPr>
+          <p:cNvPr id="15" name="Text 12"/>
+          <p:cNvSpPr/>
+          <p:nvPr/>
+        </p:nvSpPr>
+        <p:spPr>
+          <a:xfrm>
+            <a:off x="11521440" y="6492240"/>
+            <a:ext cx="457200" cy="274320"/>
+          </a:xfrm>
+          <a:prstGeom prst="rect">
+            <a:avLst/>
+          </a:prstGeom>
+          <a:noFill/>
+          <a:ln/>
+        </p:spPr>
+        <p:txBody>
+          <a:bodyPr wrap="square" rtlCol="0" anchor="ctr"/>
+          <a:lstStyle/>
+          <a:p>
+            <a:pPr marL="0" indent="0" algn="r">
+              <a:buNone/>
+            </a:pPr>
+            <a:r>
+              <a:rPr lang="en-US" sz="1000" dirty="0">
+                <a:solidFill>
+                  <a:srgbClr val="6B6B6B"/>
+                </a:solidFill>
+                <a:latin typeface="Calibri" pitchFamily="34" charset="0"/>
+                <a:ea typeface="Calibri" pitchFamily="34" charset="-122"/>
+                <a:cs typeface="Calibri" pitchFamily="34" charset="-120"/>
+              </a:rPr>
+              <a:t>6</a:t>
+            </a:r>
+            <a:endParaRPr lang="en-US" sz="1000" dirty="0"/>
+          </a:p>
+        </p:txBody>
+      </p:sp>
+      <p:sp>
+        <p:nvSpPr>
+          <p:cNvPr id="16" name="Text 13"/>
+          <p:cNvSpPr/>
+          <p:nvPr/>
+        </p:nvSpPr>
+        <p:spPr>
+          <a:xfrm>
+            <a:off x="457200" y="6492240"/>
+            <a:ext cx="5486400" cy="274320"/>
+          </a:xfrm>
+          <a:prstGeom prst="rect">
+            <a:avLst/>
+          </a:prstGeom>
+          <a:noFill/>
+          <a:ln/>
+        </p:spPr>
+        <p:txBody>
+          <a:bodyPr wrap="square" rtlCol="0" anchor="ctr"/>
+          <a:lstStyle/>
+          <a:p>
+            <a:pPr marL="0" indent="0">
+              <a:buNone/>
+            </a:pPr>
+            <a:r>
+              <a:rPr lang="en-US" sz="1000" dirty="0">
+                <a:solidFill>
+                  <a:srgbClr val="6B6B6B"/>
+                </a:solidFill>
+                <a:latin typeface="Calibri" pitchFamily="34" charset="0"/>
+                <a:ea typeface="Calibri" pitchFamily="34" charset="-122"/>
+                <a:cs typeface="Calibri" pitchFamily="34" charset="-120"/>
+              </a:rPr>
+              <a:t>HR Employee Analytics Dashboard</a:t>
+            </a:r>
+            <a:endParaRPr lang="en-US" sz="1000" dirty="0"/>
+          </a:p>
+        </p:txBody>
+      </p:sp>
       <p:pic>
         <p:nvPicPr>
-          <p:cNvPr id="4" name="Image 0" descr="images/dash2.png"/>
+          <p:cNvPr id="18" name="Picture 17">
+            <a:extLst>
+              <a:ext uri="{FF2B5EF4-FFF2-40B4-BE49-F238E27FC236}">
+                <a16:creationId xmlns:a16="http://schemas.microsoft.com/office/drawing/2014/main" id="{9096A48A-20FF-8A2E-001D-1D7706984174}"/>
+              </a:ext>
+            </a:extLst>
+          </p:cNvPr>
           <p:cNvPicPr>
             <a:picLocks noChangeAspect="1"/>
           </p:cNvPicPr>
@@ -6366,424 +6788,14 @@
         </p:blipFill>
         <p:spPr>
           <a:xfrm>
-            <a:off x="487680" y="1097279"/>
-            <a:ext cx="7955280" cy="4420949"/>
+            <a:off x="548640" y="1131800"/>
+            <a:ext cx="7820919" cy="4398892"/>
           </a:xfrm>
           <a:prstGeom prst="rect">
             <a:avLst/>
           </a:prstGeom>
         </p:spPr>
       </p:pic>
-      <p:sp>
-        <p:nvSpPr>
-          <p:cNvPr id="5" name="Shape 2"/>
-          <p:cNvSpPr/>
-          <p:nvPr/>
-        </p:nvSpPr>
-        <p:spPr>
-          <a:xfrm>
-            <a:off x="8732520" y="1005840"/>
-            <a:ext cx="2971800" cy="5074920"/>
-          </a:xfrm>
-          <a:prstGeom prst="roundRect">
-            <a:avLst>
-              <a:gd name="adj" fmla="val 3077"/>
-            </a:avLst>
-          </a:prstGeom>
-          <a:solidFill>
-            <a:srgbClr val="2F3C7E"/>
-          </a:solidFill>
-          <a:ln/>
-        </p:spPr>
-        <p:txBody>
-          <a:bodyPr/>
-          <a:lstStyle/>
-          <a:p>
-            <a:endParaRPr lang="en-IN"/>
-          </a:p>
-        </p:txBody>
-      </p:sp>
-      <p:sp>
-        <p:nvSpPr>
-          <p:cNvPr id="6" name="Text 3"/>
-          <p:cNvSpPr/>
-          <p:nvPr/>
-        </p:nvSpPr>
-        <p:spPr>
-          <a:xfrm>
-            <a:off x="9006840" y="1131800"/>
-            <a:ext cx="2468880" cy="365760"/>
-          </a:xfrm>
-          <a:prstGeom prst="rect">
-            <a:avLst/>
-          </a:prstGeom>
-          <a:noFill/>
-          <a:ln/>
-        </p:spPr>
-        <p:txBody>
-          <a:bodyPr wrap="square" rtlCol="0" anchor="ctr"/>
-          <a:lstStyle/>
-          <a:p>
-            <a:pPr marL="0" indent="0">
-              <a:buNone/>
-            </a:pPr>
-            <a:r>
-              <a:rPr lang="en-US" sz="1300" b="1" kern="0" spc="100" dirty="0">
-                <a:solidFill>
-                  <a:srgbClr val="CADCE8"/>
-                </a:solidFill>
-                <a:latin typeface="Calibri" pitchFamily="34" charset="0"/>
-                <a:ea typeface="Calibri" pitchFamily="34" charset="-122"/>
-                <a:cs typeface="Calibri" pitchFamily="34" charset="-120"/>
-              </a:rPr>
-              <a:t>WHAT TO NOTICE</a:t>
-            </a:r>
-            <a:endParaRPr lang="en-US" sz="1300" dirty="0"/>
-          </a:p>
-        </p:txBody>
-      </p:sp>
-      <p:sp>
-        <p:nvSpPr>
-          <p:cNvPr id="7" name="Shape 4"/>
-          <p:cNvSpPr/>
-          <p:nvPr/>
-        </p:nvSpPr>
-        <p:spPr>
-          <a:xfrm>
-            <a:off x="9006840" y="1819656"/>
-            <a:ext cx="82296" cy="82296"/>
-          </a:xfrm>
-          <a:prstGeom prst="ellipse">
-            <a:avLst/>
-          </a:prstGeom>
-          <a:solidFill>
-            <a:srgbClr val="990011"/>
-          </a:solidFill>
-          <a:ln/>
-        </p:spPr>
-        <p:txBody>
-          <a:bodyPr/>
-          <a:lstStyle/>
-          <a:p>
-            <a:endParaRPr lang="en-IN"/>
-          </a:p>
-        </p:txBody>
-      </p:sp>
-      <p:sp>
-        <p:nvSpPr>
-          <p:cNvPr id="8" name="Text 5"/>
-          <p:cNvSpPr/>
-          <p:nvPr/>
-        </p:nvSpPr>
-        <p:spPr>
-          <a:xfrm>
-            <a:off x="9189720" y="1439904"/>
-            <a:ext cx="2423160" cy="822960"/>
-          </a:xfrm>
-          <a:prstGeom prst="rect">
-            <a:avLst/>
-          </a:prstGeom>
-          <a:noFill/>
-          <a:ln/>
-        </p:spPr>
-        <p:txBody>
-          <a:bodyPr wrap="square" lIns="0" tIns="0" rIns="0" bIns="0" rtlCol="0" anchor="ctr"/>
-          <a:lstStyle/>
-          <a:p>
-            <a:pPr marL="0" indent="0">
-              <a:buNone/>
-            </a:pPr>
-            <a:r>
-              <a:rPr lang="en-US" sz="1150" b="1" dirty="0">
-                <a:solidFill>
-                  <a:srgbClr val="FCF6F5"/>
-                </a:solidFill>
-                <a:latin typeface="Calibri" pitchFamily="34" charset="0"/>
-                <a:ea typeface="Calibri" pitchFamily="34" charset="-122"/>
-                <a:cs typeface="Calibri" pitchFamily="34" charset="-120"/>
-              </a:rPr>
-              <a:t>Employee Details table with drill-through to individual records</a:t>
-            </a:r>
-            <a:endParaRPr lang="en-US" sz="1150" b="1" dirty="0"/>
-          </a:p>
-        </p:txBody>
-      </p:sp>
-      <p:sp>
-        <p:nvSpPr>
-          <p:cNvPr id="9" name="Shape 6"/>
-          <p:cNvSpPr/>
-          <p:nvPr/>
-        </p:nvSpPr>
-        <p:spPr>
-          <a:xfrm>
-            <a:off x="9006840" y="2715768"/>
-            <a:ext cx="82296" cy="82296"/>
-          </a:xfrm>
-          <a:prstGeom prst="ellipse">
-            <a:avLst/>
-          </a:prstGeom>
-          <a:solidFill>
-            <a:srgbClr val="990011"/>
-          </a:solidFill>
-          <a:ln/>
-        </p:spPr>
-        <p:txBody>
-          <a:bodyPr/>
-          <a:lstStyle/>
-          <a:p>
-            <a:endParaRPr lang="en-IN"/>
-          </a:p>
-        </p:txBody>
-      </p:sp>
-      <p:sp>
-        <p:nvSpPr>
-          <p:cNvPr id="10" name="Text 7"/>
-          <p:cNvSpPr/>
-          <p:nvPr/>
-        </p:nvSpPr>
-        <p:spPr>
-          <a:xfrm>
-            <a:off x="9189720" y="2336016"/>
-            <a:ext cx="2423160" cy="822960"/>
-          </a:xfrm>
-          <a:prstGeom prst="rect">
-            <a:avLst/>
-          </a:prstGeom>
-          <a:noFill/>
-          <a:ln/>
-        </p:spPr>
-        <p:txBody>
-          <a:bodyPr wrap="square" lIns="0" tIns="0" rIns="0" bIns="0" rtlCol="0" anchor="ctr"/>
-          <a:lstStyle/>
-          <a:p>
-            <a:pPr marL="0" indent="0">
-              <a:buNone/>
-            </a:pPr>
-            <a:r>
-              <a:rPr lang="en-US" sz="1150" b="1" dirty="0">
-                <a:solidFill>
-                  <a:srgbClr val="FCF6F5"/>
-                </a:solidFill>
-                <a:latin typeface="Calibri" pitchFamily="34" charset="0"/>
-                <a:ea typeface="Calibri" pitchFamily="34" charset="-122"/>
-                <a:cs typeface="Calibri" pitchFamily="34" charset="-120"/>
-              </a:rPr>
-              <a:t>Average Salary by Job Role</a:t>
-            </a:r>
-            <a:endParaRPr lang="en-US" sz="1150" b="1" dirty="0"/>
-          </a:p>
-        </p:txBody>
-      </p:sp>
-      <p:sp>
-        <p:nvSpPr>
-          <p:cNvPr id="11" name="Shape 8"/>
-          <p:cNvSpPr/>
-          <p:nvPr/>
-        </p:nvSpPr>
-        <p:spPr>
-          <a:xfrm>
-            <a:off x="9006840" y="3611880"/>
-            <a:ext cx="82296" cy="82296"/>
-          </a:xfrm>
-          <a:prstGeom prst="ellipse">
-            <a:avLst/>
-          </a:prstGeom>
-          <a:solidFill>
-            <a:srgbClr val="990011"/>
-          </a:solidFill>
-          <a:ln/>
-        </p:spPr>
-        <p:txBody>
-          <a:bodyPr/>
-          <a:lstStyle/>
-          <a:p>
-            <a:endParaRPr lang="en-IN"/>
-          </a:p>
-        </p:txBody>
-      </p:sp>
-      <p:sp>
-        <p:nvSpPr>
-          <p:cNvPr id="12" name="Text 9"/>
-          <p:cNvSpPr/>
-          <p:nvPr/>
-        </p:nvSpPr>
-        <p:spPr>
-          <a:xfrm>
-            <a:off x="9189720" y="3232128"/>
-            <a:ext cx="2423160" cy="822960"/>
-          </a:xfrm>
-          <a:prstGeom prst="rect">
-            <a:avLst/>
-          </a:prstGeom>
-          <a:noFill/>
-          <a:ln/>
-        </p:spPr>
-        <p:txBody>
-          <a:bodyPr wrap="square" lIns="0" tIns="0" rIns="0" bIns="0" rtlCol="0" anchor="ctr"/>
-          <a:lstStyle/>
-          <a:p>
-            <a:pPr marL="0" indent="0">
-              <a:buNone/>
-            </a:pPr>
-            <a:r>
-              <a:rPr lang="en-US" sz="1150" b="1" dirty="0">
-                <a:solidFill>
-                  <a:srgbClr val="FCF6F5"/>
-                </a:solidFill>
-                <a:latin typeface="Calibri" pitchFamily="34" charset="0"/>
-                <a:ea typeface="Calibri" pitchFamily="34" charset="-122"/>
-                <a:cs typeface="Calibri" pitchFamily="34" charset="-120"/>
-              </a:rPr>
-              <a:t>Total Employees by Job Satisfaction</a:t>
-            </a:r>
-            <a:endParaRPr lang="en-US" sz="1150" b="1" dirty="0"/>
-          </a:p>
-        </p:txBody>
-      </p:sp>
-      <p:sp>
-        <p:nvSpPr>
-          <p:cNvPr id="13" name="Shape 10"/>
-          <p:cNvSpPr/>
-          <p:nvPr/>
-        </p:nvSpPr>
-        <p:spPr>
-          <a:xfrm>
-            <a:off x="9006840" y="4507992"/>
-            <a:ext cx="82296" cy="82296"/>
-          </a:xfrm>
-          <a:prstGeom prst="ellipse">
-            <a:avLst/>
-          </a:prstGeom>
-          <a:solidFill>
-            <a:srgbClr val="990011"/>
-          </a:solidFill>
-          <a:ln/>
-        </p:spPr>
-        <p:txBody>
-          <a:bodyPr/>
-          <a:lstStyle/>
-          <a:p>
-            <a:endParaRPr lang="en-IN"/>
-          </a:p>
-        </p:txBody>
-      </p:sp>
-      <p:sp>
-        <p:nvSpPr>
-          <p:cNvPr id="14" name="Text 11"/>
-          <p:cNvSpPr/>
-          <p:nvPr/>
-        </p:nvSpPr>
-        <p:spPr>
-          <a:xfrm>
-            <a:off x="9189720" y="4128240"/>
-            <a:ext cx="2423160" cy="822960"/>
-          </a:xfrm>
-          <a:prstGeom prst="rect">
-            <a:avLst/>
-          </a:prstGeom>
-          <a:noFill/>
-          <a:ln/>
-        </p:spPr>
-        <p:txBody>
-          <a:bodyPr wrap="square" lIns="0" tIns="0" rIns="0" bIns="0" rtlCol="0" anchor="ctr"/>
-          <a:lstStyle/>
-          <a:p>
-            <a:pPr marL="0" indent="0">
-              <a:buNone/>
-            </a:pPr>
-            <a:r>
-              <a:rPr lang="en-US" sz="1150" b="1" dirty="0">
-                <a:solidFill>
-                  <a:srgbClr val="FCF6F5"/>
-                </a:solidFill>
-                <a:latin typeface="Calibri" pitchFamily="34" charset="0"/>
-                <a:ea typeface="Calibri" pitchFamily="34" charset="-122"/>
-                <a:cs typeface="Calibri" pitchFamily="34" charset="-120"/>
-              </a:rPr>
-              <a:t>Total Employees by Company Tenure Group</a:t>
-            </a:r>
-            <a:endParaRPr lang="en-US" sz="1150" b="1" dirty="0"/>
-          </a:p>
-        </p:txBody>
-      </p:sp>
-      <p:sp>
-        <p:nvSpPr>
-          <p:cNvPr id="15" name="Text 12"/>
-          <p:cNvSpPr/>
-          <p:nvPr/>
-        </p:nvSpPr>
-        <p:spPr>
-          <a:xfrm>
-            <a:off x="11521440" y="6492240"/>
-            <a:ext cx="457200" cy="274320"/>
-          </a:xfrm>
-          <a:prstGeom prst="rect">
-            <a:avLst/>
-          </a:prstGeom>
-          <a:noFill/>
-          <a:ln/>
-        </p:spPr>
-        <p:txBody>
-          <a:bodyPr wrap="square" rtlCol="0" anchor="ctr"/>
-          <a:lstStyle/>
-          <a:p>
-            <a:pPr marL="0" indent="0" algn="r">
-              <a:buNone/>
-            </a:pPr>
-            <a:r>
-              <a:rPr lang="en-US" sz="1000" dirty="0">
-                <a:solidFill>
-                  <a:srgbClr val="6B6B6B"/>
-                </a:solidFill>
-                <a:latin typeface="Calibri" pitchFamily="34" charset="0"/>
-                <a:ea typeface="Calibri" pitchFamily="34" charset="-122"/>
-                <a:cs typeface="Calibri" pitchFamily="34" charset="-120"/>
-              </a:rPr>
-              <a:t>6</a:t>
-            </a:r>
-            <a:endParaRPr lang="en-US" sz="1000" dirty="0"/>
-          </a:p>
-        </p:txBody>
-      </p:sp>
-      <p:sp>
-        <p:nvSpPr>
-          <p:cNvPr id="16" name="Text 13"/>
-          <p:cNvSpPr/>
-          <p:nvPr/>
-        </p:nvSpPr>
-        <p:spPr>
-          <a:xfrm>
-            <a:off x="457200" y="6492240"/>
-            <a:ext cx="5486400" cy="274320"/>
-          </a:xfrm>
-          <a:prstGeom prst="rect">
-            <a:avLst/>
-          </a:prstGeom>
-          <a:noFill/>
-          <a:ln/>
-        </p:spPr>
-        <p:txBody>
-          <a:bodyPr wrap="square" rtlCol="0" anchor="ctr"/>
-          <a:lstStyle/>
-          <a:p>
-            <a:pPr marL="0" indent="0">
-              <a:buNone/>
-            </a:pPr>
-            <a:r>
-              <a:rPr lang="en-US" sz="1000" dirty="0">
-                <a:solidFill>
-                  <a:srgbClr val="6B6B6B"/>
-                </a:solidFill>
-                <a:latin typeface="Calibri" pitchFamily="34" charset="0"/>
-                <a:ea typeface="Calibri" pitchFamily="34" charset="-122"/>
-                <a:cs typeface="Calibri" pitchFamily="34" charset="-120"/>
-              </a:rPr>
-              <a:t>HR Employee Analytics Dashboard</a:t>
-            </a:r>
-            <a:endParaRPr lang="en-US" sz="1000" dirty="0"/>
-          </a:p>
-        </p:txBody>
-      </p:sp>
     </p:spTree>
   </p:cSld>
   <p:clrMapOvr>
@@ -6897,9 +6909,425 @@
           </a:p>
         </p:txBody>
       </p:sp>
+      <p:sp>
+        <p:nvSpPr>
+          <p:cNvPr id="5" name="Shape 2"/>
+          <p:cNvSpPr/>
+          <p:nvPr/>
+        </p:nvSpPr>
+        <p:spPr>
+          <a:xfrm>
+            <a:off x="8732520" y="1005840"/>
+            <a:ext cx="2971800" cy="5074920"/>
+          </a:xfrm>
+          <a:prstGeom prst="roundRect">
+            <a:avLst>
+              <a:gd name="adj" fmla="val 3077"/>
+            </a:avLst>
+          </a:prstGeom>
+          <a:solidFill>
+            <a:srgbClr val="2F3C7E"/>
+          </a:solidFill>
+          <a:ln/>
+        </p:spPr>
+        <p:txBody>
+          <a:bodyPr/>
+          <a:lstStyle/>
+          <a:p>
+            <a:endParaRPr lang="en-IN"/>
+          </a:p>
+        </p:txBody>
+      </p:sp>
+      <p:sp>
+        <p:nvSpPr>
+          <p:cNvPr id="6" name="Text 3"/>
+          <p:cNvSpPr/>
+          <p:nvPr/>
+        </p:nvSpPr>
+        <p:spPr>
+          <a:xfrm>
+            <a:off x="9006840" y="1159793"/>
+            <a:ext cx="2468880" cy="365760"/>
+          </a:xfrm>
+          <a:prstGeom prst="rect">
+            <a:avLst/>
+          </a:prstGeom>
+          <a:noFill/>
+          <a:ln/>
+        </p:spPr>
+        <p:txBody>
+          <a:bodyPr wrap="square" rtlCol="0" anchor="ctr"/>
+          <a:lstStyle/>
+          <a:p>
+            <a:pPr marL="0" indent="0">
+              <a:buNone/>
+            </a:pPr>
+            <a:r>
+              <a:rPr lang="en-US" sz="1300" b="1" kern="0" spc="100" dirty="0">
+                <a:solidFill>
+                  <a:srgbClr val="CADCE8"/>
+                </a:solidFill>
+                <a:latin typeface="Calibri" pitchFamily="34" charset="0"/>
+                <a:ea typeface="Calibri" pitchFamily="34" charset="-122"/>
+                <a:cs typeface="Calibri" pitchFamily="34" charset="-120"/>
+              </a:rPr>
+              <a:t>WHAT TO NOTICE</a:t>
+            </a:r>
+            <a:endParaRPr lang="en-US" sz="1300" dirty="0"/>
+          </a:p>
+        </p:txBody>
+      </p:sp>
+      <p:sp>
+        <p:nvSpPr>
+          <p:cNvPr id="7" name="Shape 4"/>
+          <p:cNvSpPr/>
+          <p:nvPr/>
+        </p:nvSpPr>
+        <p:spPr>
+          <a:xfrm>
+            <a:off x="9006840" y="1819656"/>
+            <a:ext cx="82296" cy="82296"/>
+          </a:xfrm>
+          <a:prstGeom prst="ellipse">
+            <a:avLst/>
+          </a:prstGeom>
+          <a:solidFill>
+            <a:srgbClr val="990011"/>
+          </a:solidFill>
+          <a:ln/>
+        </p:spPr>
+        <p:txBody>
+          <a:bodyPr/>
+          <a:lstStyle/>
+          <a:p>
+            <a:endParaRPr lang="en-IN"/>
+          </a:p>
+        </p:txBody>
+      </p:sp>
+      <p:sp>
+        <p:nvSpPr>
+          <p:cNvPr id="8" name="Text 5"/>
+          <p:cNvSpPr/>
+          <p:nvPr/>
+        </p:nvSpPr>
+        <p:spPr>
+          <a:xfrm>
+            <a:off x="9189720" y="1439898"/>
+            <a:ext cx="2423160" cy="822960"/>
+          </a:xfrm>
+          <a:prstGeom prst="rect">
+            <a:avLst/>
+          </a:prstGeom>
+          <a:noFill/>
+          <a:ln/>
+        </p:spPr>
+        <p:txBody>
+          <a:bodyPr wrap="square" lIns="0" tIns="0" rIns="0" bIns="0" rtlCol="0" anchor="ctr"/>
+          <a:lstStyle/>
+          <a:p>
+            <a:pPr marL="0" indent="0">
+              <a:buNone/>
+            </a:pPr>
+            <a:r>
+              <a:rPr lang="en-US" sz="1150" b="1" dirty="0">
+                <a:solidFill>
+                  <a:srgbClr val="FCF6F5"/>
+                </a:solidFill>
+                <a:latin typeface="Calibri" pitchFamily="34" charset="0"/>
+                <a:ea typeface="Calibri" pitchFamily="34" charset="-122"/>
+                <a:cs typeface="Calibri" pitchFamily="34" charset="-120"/>
+              </a:rPr>
+              <a:t>Department summary table (working years, tenure, income)</a:t>
+            </a:r>
+            <a:endParaRPr lang="en-US" sz="1150" b="1" dirty="0"/>
+          </a:p>
+        </p:txBody>
+      </p:sp>
+      <p:sp>
+        <p:nvSpPr>
+          <p:cNvPr id="9" name="Shape 6"/>
+          <p:cNvSpPr/>
+          <p:nvPr/>
+        </p:nvSpPr>
+        <p:spPr>
+          <a:xfrm>
+            <a:off x="9006840" y="2715768"/>
+            <a:ext cx="82296" cy="82296"/>
+          </a:xfrm>
+          <a:prstGeom prst="ellipse">
+            <a:avLst/>
+          </a:prstGeom>
+          <a:solidFill>
+            <a:srgbClr val="990011"/>
+          </a:solidFill>
+          <a:ln/>
+        </p:spPr>
+        <p:txBody>
+          <a:bodyPr/>
+          <a:lstStyle/>
+          <a:p>
+            <a:endParaRPr lang="en-IN"/>
+          </a:p>
+        </p:txBody>
+      </p:sp>
+      <p:sp>
+        <p:nvSpPr>
+          <p:cNvPr id="10" name="Text 7"/>
+          <p:cNvSpPr/>
+          <p:nvPr/>
+        </p:nvSpPr>
+        <p:spPr>
+          <a:xfrm>
+            <a:off x="9189720" y="2336010"/>
+            <a:ext cx="2423160" cy="822960"/>
+          </a:xfrm>
+          <a:prstGeom prst="rect">
+            <a:avLst/>
+          </a:prstGeom>
+          <a:noFill/>
+          <a:ln/>
+        </p:spPr>
+        <p:txBody>
+          <a:bodyPr wrap="square" lIns="0" tIns="0" rIns="0" bIns="0" rtlCol="0" anchor="ctr"/>
+          <a:lstStyle/>
+          <a:p>
+            <a:pPr marL="0" indent="0">
+              <a:buNone/>
+            </a:pPr>
+            <a:r>
+              <a:rPr lang="en-US" sz="1150" b="1" dirty="0">
+                <a:solidFill>
+                  <a:srgbClr val="FCF6F5"/>
+                </a:solidFill>
+                <a:latin typeface="Calibri" pitchFamily="34" charset="0"/>
+                <a:ea typeface="Calibri" pitchFamily="34" charset="-122"/>
+                <a:cs typeface="Calibri" pitchFamily="34" charset="-120"/>
+              </a:rPr>
+              <a:t>Employees Left by Job Role and Average Salary by Job Role</a:t>
+            </a:r>
+            <a:endParaRPr lang="en-US" sz="1150" b="1" dirty="0"/>
+          </a:p>
+        </p:txBody>
+      </p:sp>
+      <p:sp>
+        <p:nvSpPr>
+          <p:cNvPr id="11" name="Shape 8"/>
+          <p:cNvSpPr/>
+          <p:nvPr/>
+        </p:nvSpPr>
+        <p:spPr>
+          <a:xfrm>
+            <a:off x="9006840" y="3611880"/>
+            <a:ext cx="82296" cy="82296"/>
+          </a:xfrm>
+          <a:prstGeom prst="ellipse">
+            <a:avLst/>
+          </a:prstGeom>
+          <a:solidFill>
+            <a:srgbClr val="990011"/>
+          </a:solidFill>
+          <a:ln/>
+        </p:spPr>
+        <p:txBody>
+          <a:bodyPr/>
+          <a:lstStyle/>
+          <a:p>
+            <a:endParaRPr lang="en-IN"/>
+          </a:p>
+        </p:txBody>
+      </p:sp>
+      <p:sp>
+        <p:nvSpPr>
+          <p:cNvPr id="12" name="Text 9"/>
+          <p:cNvSpPr/>
+          <p:nvPr/>
+        </p:nvSpPr>
+        <p:spPr>
+          <a:xfrm>
+            <a:off x="9189720" y="3232122"/>
+            <a:ext cx="2423160" cy="822960"/>
+          </a:xfrm>
+          <a:prstGeom prst="rect">
+            <a:avLst/>
+          </a:prstGeom>
+          <a:noFill/>
+          <a:ln/>
+        </p:spPr>
+        <p:txBody>
+          <a:bodyPr wrap="square" lIns="0" tIns="0" rIns="0" bIns="0" rtlCol="0" anchor="ctr"/>
+          <a:lstStyle/>
+          <a:p>
+            <a:pPr marL="0" indent="0">
+              <a:buNone/>
+            </a:pPr>
+            <a:r>
+              <a:rPr lang="en-US" sz="1150" b="1" dirty="0">
+                <a:solidFill>
+                  <a:srgbClr val="FCF6F5"/>
+                </a:solidFill>
+                <a:latin typeface="Calibri" pitchFamily="34" charset="0"/>
+                <a:ea typeface="Calibri" pitchFamily="34" charset="-122"/>
+                <a:cs typeface="Calibri" pitchFamily="34" charset="-120"/>
+              </a:rPr>
+              <a:t>Job Satisfaction breakdown</a:t>
+            </a:r>
+            <a:endParaRPr lang="en-US" sz="1150" b="1" dirty="0"/>
+          </a:p>
+        </p:txBody>
+      </p:sp>
+      <p:sp>
+        <p:nvSpPr>
+          <p:cNvPr id="13" name="Shape 10"/>
+          <p:cNvSpPr/>
+          <p:nvPr/>
+        </p:nvSpPr>
+        <p:spPr>
+          <a:xfrm>
+            <a:off x="9006840" y="4507992"/>
+            <a:ext cx="82296" cy="82296"/>
+          </a:xfrm>
+          <a:prstGeom prst="ellipse">
+            <a:avLst/>
+          </a:prstGeom>
+          <a:solidFill>
+            <a:srgbClr val="990011"/>
+          </a:solidFill>
+          <a:ln/>
+        </p:spPr>
+        <p:txBody>
+          <a:bodyPr/>
+          <a:lstStyle/>
+          <a:p>
+            <a:endParaRPr lang="en-IN"/>
+          </a:p>
+        </p:txBody>
+      </p:sp>
+      <p:sp>
+        <p:nvSpPr>
+          <p:cNvPr id="14" name="Text 11"/>
+          <p:cNvSpPr/>
+          <p:nvPr/>
+        </p:nvSpPr>
+        <p:spPr>
+          <a:xfrm>
+            <a:off x="9189720" y="4128234"/>
+            <a:ext cx="2423160" cy="822960"/>
+          </a:xfrm>
+          <a:prstGeom prst="rect">
+            <a:avLst/>
+          </a:prstGeom>
+          <a:noFill/>
+          <a:ln/>
+        </p:spPr>
+        <p:txBody>
+          <a:bodyPr wrap="square" lIns="0" tIns="0" rIns="0" bIns="0" rtlCol="0" anchor="ctr"/>
+          <a:lstStyle/>
+          <a:p>
+            <a:pPr marL="0" indent="0">
+              <a:buNone/>
+            </a:pPr>
+            <a:r>
+              <a:rPr lang="en-US" sz="1150" b="1" dirty="0">
+                <a:solidFill>
+                  <a:srgbClr val="FCF6F5"/>
+                </a:solidFill>
+                <a:latin typeface="Calibri" pitchFamily="34" charset="0"/>
+                <a:ea typeface="Calibri" pitchFamily="34" charset="-122"/>
+                <a:cs typeface="Calibri" pitchFamily="34" charset="-120"/>
+              </a:rPr>
+              <a:t>Overtime analysis</a:t>
+            </a:r>
+            <a:endParaRPr lang="en-US" sz="1150" b="1" dirty="0"/>
+          </a:p>
+        </p:txBody>
+      </p:sp>
+      <p:sp>
+        <p:nvSpPr>
+          <p:cNvPr id="15" name="Text 12"/>
+          <p:cNvSpPr/>
+          <p:nvPr/>
+        </p:nvSpPr>
+        <p:spPr>
+          <a:xfrm>
+            <a:off x="11521440" y="6492240"/>
+            <a:ext cx="457200" cy="274320"/>
+          </a:xfrm>
+          <a:prstGeom prst="rect">
+            <a:avLst/>
+          </a:prstGeom>
+          <a:noFill/>
+          <a:ln/>
+        </p:spPr>
+        <p:txBody>
+          <a:bodyPr wrap="square" rtlCol="0" anchor="ctr"/>
+          <a:lstStyle/>
+          <a:p>
+            <a:pPr marL="0" indent="0" algn="r">
+              <a:buNone/>
+            </a:pPr>
+            <a:r>
+              <a:rPr lang="en-US" sz="1000" dirty="0">
+                <a:solidFill>
+                  <a:srgbClr val="6B6B6B"/>
+                </a:solidFill>
+                <a:latin typeface="Calibri" pitchFamily="34" charset="0"/>
+                <a:ea typeface="Calibri" pitchFamily="34" charset="-122"/>
+                <a:cs typeface="Calibri" pitchFamily="34" charset="-120"/>
+              </a:rPr>
+              <a:t>7</a:t>
+            </a:r>
+            <a:endParaRPr lang="en-US" sz="1000" dirty="0"/>
+          </a:p>
+        </p:txBody>
+      </p:sp>
+      <p:sp>
+        <p:nvSpPr>
+          <p:cNvPr id="16" name="Text 13"/>
+          <p:cNvSpPr/>
+          <p:nvPr/>
+        </p:nvSpPr>
+        <p:spPr>
+          <a:xfrm>
+            <a:off x="457200" y="6492240"/>
+            <a:ext cx="5486400" cy="274320"/>
+          </a:xfrm>
+          <a:prstGeom prst="rect">
+            <a:avLst/>
+          </a:prstGeom>
+          <a:noFill/>
+          <a:ln/>
+        </p:spPr>
+        <p:txBody>
+          <a:bodyPr wrap="square" rtlCol="0" anchor="ctr"/>
+          <a:lstStyle/>
+          <a:p>
+            <a:pPr marL="0" indent="0">
+              <a:buNone/>
+            </a:pPr>
+            <a:r>
+              <a:rPr lang="en-US" sz="1000" dirty="0">
+                <a:solidFill>
+                  <a:srgbClr val="6B6B6B"/>
+                </a:solidFill>
+                <a:latin typeface="Calibri" pitchFamily="34" charset="0"/>
+                <a:ea typeface="Calibri" pitchFamily="34" charset="-122"/>
+                <a:cs typeface="Calibri" pitchFamily="34" charset="-120"/>
+              </a:rPr>
+              <a:t>HR Employee Analytics Dashboard</a:t>
+            </a:r>
+            <a:endParaRPr lang="en-US" sz="1000" dirty="0"/>
+          </a:p>
+        </p:txBody>
+      </p:sp>
       <p:pic>
         <p:nvPicPr>
-          <p:cNvPr id="4" name="Image 0" descr="images/dash3.png"/>
+          <p:cNvPr id="18" name="Picture 17">
+            <a:extLst>
+              <a:ext uri="{FF2B5EF4-FFF2-40B4-BE49-F238E27FC236}">
+                <a16:creationId xmlns:a16="http://schemas.microsoft.com/office/drawing/2014/main" id="{E46E7FF0-D170-CF58-8ADB-B1CB1F06C60F}"/>
+              </a:ext>
+            </a:extLst>
+          </p:cNvPr>
           <p:cNvPicPr>
             <a:picLocks noChangeAspect="1"/>
           </p:cNvPicPr>
@@ -6913,424 +7341,14 @@
         </p:blipFill>
         <p:spPr>
           <a:xfrm>
-            <a:off x="487680" y="1097279"/>
-            <a:ext cx="7955280" cy="4471437"/>
+            <a:off x="548640" y="1159792"/>
+            <a:ext cx="7876903" cy="4410583"/>
           </a:xfrm>
           <a:prstGeom prst="rect">
             <a:avLst/>
           </a:prstGeom>
         </p:spPr>
       </p:pic>
-      <p:sp>
-        <p:nvSpPr>
-          <p:cNvPr id="5" name="Shape 2"/>
-          <p:cNvSpPr/>
-          <p:nvPr/>
-        </p:nvSpPr>
-        <p:spPr>
-          <a:xfrm>
-            <a:off x="8732520" y="1005840"/>
-            <a:ext cx="2971800" cy="5074920"/>
-          </a:xfrm>
-          <a:prstGeom prst="roundRect">
-            <a:avLst>
-              <a:gd name="adj" fmla="val 3077"/>
-            </a:avLst>
-          </a:prstGeom>
-          <a:solidFill>
-            <a:srgbClr val="2F3C7E"/>
-          </a:solidFill>
-          <a:ln/>
-        </p:spPr>
-        <p:txBody>
-          <a:bodyPr/>
-          <a:lstStyle/>
-          <a:p>
-            <a:endParaRPr lang="en-IN"/>
-          </a:p>
-        </p:txBody>
-      </p:sp>
-      <p:sp>
-        <p:nvSpPr>
-          <p:cNvPr id="6" name="Text 3"/>
-          <p:cNvSpPr/>
-          <p:nvPr/>
-        </p:nvSpPr>
-        <p:spPr>
-          <a:xfrm>
-            <a:off x="9006840" y="1159793"/>
-            <a:ext cx="2468880" cy="365760"/>
-          </a:xfrm>
-          <a:prstGeom prst="rect">
-            <a:avLst/>
-          </a:prstGeom>
-          <a:noFill/>
-          <a:ln/>
-        </p:spPr>
-        <p:txBody>
-          <a:bodyPr wrap="square" rtlCol="0" anchor="ctr"/>
-          <a:lstStyle/>
-          <a:p>
-            <a:pPr marL="0" indent="0">
-              <a:buNone/>
-            </a:pPr>
-            <a:r>
-              <a:rPr lang="en-US" sz="1300" b="1" kern="0" spc="100" dirty="0">
-                <a:solidFill>
-                  <a:srgbClr val="CADCE8"/>
-                </a:solidFill>
-                <a:latin typeface="Calibri" pitchFamily="34" charset="0"/>
-                <a:ea typeface="Calibri" pitchFamily="34" charset="-122"/>
-                <a:cs typeface="Calibri" pitchFamily="34" charset="-120"/>
-              </a:rPr>
-              <a:t>WHAT TO NOTICE</a:t>
-            </a:r>
-            <a:endParaRPr lang="en-US" sz="1300" dirty="0"/>
-          </a:p>
-        </p:txBody>
-      </p:sp>
-      <p:sp>
-        <p:nvSpPr>
-          <p:cNvPr id="7" name="Shape 4"/>
-          <p:cNvSpPr/>
-          <p:nvPr/>
-        </p:nvSpPr>
-        <p:spPr>
-          <a:xfrm>
-            <a:off x="9006840" y="1819656"/>
-            <a:ext cx="82296" cy="82296"/>
-          </a:xfrm>
-          <a:prstGeom prst="ellipse">
-            <a:avLst/>
-          </a:prstGeom>
-          <a:solidFill>
-            <a:srgbClr val="990011"/>
-          </a:solidFill>
-          <a:ln/>
-        </p:spPr>
-        <p:txBody>
-          <a:bodyPr/>
-          <a:lstStyle/>
-          <a:p>
-            <a:endParaRPr lang="en-IN"/>
-          </a:p>
-        </p:txBody>
-      </p:sp>
-      <p:sp>
-        <p:nvSpPr>
-          <p:cNvPr id="8" name="Text 5"/>
-          <p:cNvSpPr/>
-          <p:nvPr/>
-        </p:nvSpPr>
-        <p:spPr>
-          <a:xfrm>
-            <a:off x="9189720" y="1439898"/>
-            <a:ext cx="2423160" cy="822960"/>
-          </a:xfrm>
-          <a:prstGeom prst="rect">
-            <a:avLst/>
-          </a:prstGeom>
-          <a:noFill/>
-          <a:ln/>
-        </p:spPr>
-        <p:txBody>
-          <a:bodyPr wrap="square" lIns="0" tIns="0" rIns="0" bIns="0" rtlCol="0" anchor="ctr"/>
-          <a:lstStyle/>
-          <a:p>
-            <a:pPr marL="0" indent="0">
-              <a:buNone/>
-            </a:pPr>
-            <a:r>
-              <a:rPr lang="en-US" sz="1150" b="1" dirty="0">
-                <a:solidFill>
-                  <a:srgbClr val="FCF6F5"/>
-                </a:solidFill>
-                <a:latin typeface="Calibri" pitchFamily="34" charset="0"/>
-                <a:ea typeface="Calibri" pitchFamily="34" charset="-122"/>
-                <a:cs typeface="Calibri" pitchFamily="34" charset="-120"/>
-              </a:rPr>
-              <a:t>Department summary table (working years, tenure, income)</a:t>
-            </a:r>
-            <a:endParaRPr lang="en-US" sz="1150" b="1" dirty="0"/>
-          </a:p>
-        </p:txBody>
-      </p:sp>
-      <p:sp>
-        <p:nvSpPr>
-          <p:cNvPr id="9" name="Shape 6"/>
-          <p:cNvSpPr/>
-          <p:nvPr/>
-        </p:nvSpPr>
-        <p:spPr>
-          <a:xfrm>
-            <a:off x="9006840" y="2715768"/>
-            <a:ext cx="82296" cy="82296"/>
-          </a:xfrm>
-          <a:prstGeom prst="ellipse">
-            <a:avLst/>
-          </a:prstGeom>
-          <a:solidFill>
-            <a:srgbClr val="990011"/>
-          </a:solidFill>
-          <a:ln/>
-        </p:spPr>
-        <p:txBody>
-          <a:bodyPr/>
-          <a:lstStyle/>
-          <a:p>
-            <a:endParaRPr lang="en-IN"/>
-          </a:p>
-        </p:txBody>
-      </p:sp>
-      <p:sp>
-        <p:nvSpPr>
-          <p:cNvPr id="10" name="Text 7"/>
-          <p:cNvSpPr/>
-          <p:nvPr/>
-        </p:nvSpPr>
-        <p:spPr>
-          <a:xfrm>
-            <a:off x="9189720" y="2336010"/>
-            <a:ext cx="2423160" cy="822960"/>
-          </a:xfrm>
-          <a:prstGeom prst="rect">
-            <a:avLst/>
-          </a:prstGeom>
-          <a:noFill/>
-          <a:ln/>
-        </p:spPr>
-        <p:txBody>
-          <a:bodyPr wrap="square" lIns="0" tIns="0" rIns="0" bIns="0" rtlCol="0" anchor="ctr"/>
-          <a:lstStyle/>
-          <a:p>
-            <a:pPr marL="0" indent="0">
-              <a:buNone/>
-            </a:pPr>
-            <a:r>
-              <a:rPr lang="en-US" sz="1150" b="1" dirty="0">
-                <a:solidFill>
-                  <a:srgbClr val="FCF6F5"/>
-                </a:solidFill>
-                <a:latin typeface="Calibri" pitchFamily="34" charset="0"/>
-                <a:ea typeface="Calibri" pitchFamily="34" charset="-122"/>
-                <a:cs typeface="Calibri" pitchFamily="34" charset="-120"/>
-              </a:rPr>
-              <a:t>Employees Left by Job Role and Average Salary by Job Role</a:t>
-            </a:r>
-            <a:endParaRPr lang="en-US" sz="1150" b="1" dirty="0"/>
-          </a:p>
-        </p:txBody>
-      </p:sp>
-      <p:sp>
-        <p:nvSpPr>
-          <p:cNvPr id="11" name="Shape 8"/>
-          <p:cNvSpPr/>
-          <p:nvPr/>
-        </p:nvSpPr>
-        <p:spPr>
-          <a:xfrm>
-            <a:off x="9006840" y="3611880"/>
-            <a:ext cx="82296" cy="82296"/>
-          </a:xfrm>
-          <a:prstGeom prst="ellipse">
-            <a:avLst/>
-          </a:prstGeom>
-          <a:solidFill>
-            <a:srgbClr val="990011"/>
-          </a:solidFill>
-          <a:ln/>
-        </p:spPr>
-        <p:txBody>
-          <a:bodyPr/>
-          <a:lstStyle/>
-          <a:p>
-            <a:endParaRPr lang="en-IN"/>
-          </a:p>
-        </p:txBody>
-      </p:sp>
-      <p:sp>
-        <p:nvSpPr>
-          <p:cNvPr id="12" name="Text 9"/>
-          <p:cNvSpPr/>
-          <p:nvPr/>
-        </p:nvSpPr>
-        <p:spPr>
-          <a:xfrm>
-            <a:off x="9189720" y="3232122"/>
-            <a:ext cx="2423160" cy="822960"/>
-          </a:xfrm>
-          <a:prstGeom prst="rect">
-            <a:avLst/>
-          </a:prstGeom>
-          <a:noFill/>
-          <a:ln/>
-        </p:spPr>
-        <p:txBody>
-          <a:bodyPr wrap="square" lIns="0" tIns="0" rIns="0" bIns="0" rtlCol="0" anchor="ctr"/>
-          <a:lstStyle/>
-          <a:p>
-            <a:pPr marL="0" indent="0">
-              <a:buNone/>
-            </a:pPr>
-            <a:r>
-              <a:rPr lang="en-US" sz="1150" b="1" dirty="0">
-                <a:solidFill>
-                  <a:srgbClr val="FCF6F5"/>
-                </a:solidFill>
-                <a:latin typeface="Calibri" pitchFamily="34" charset="0"/>
-                <a:ea typeface="Calibri" pitchFamily="34" charset="-122"/>
-                <a:cs typeface="Calibri" pitchFamily="34" charset="-120"/>
-              </a:rPr>
-              <a:t>Job Satisfaction breakdown</a:t>
-            </a:r>
-            <a:endParaRPr lang="en-US" sz="1150" b="1" dirty="0"/>
-          </a:p>
-        </p:txBody>
-      </p:sp>
-      <p:sp>
-        <p:nvSpPr>
-          <p:cNvPr id="13" name="Shape 10"/>
-          <p:cNvSpPr/>
-          <p:nvPr/>
-        </p:nvSpPr>
-        <p:spPr>
-          <a:xfrm>
-            <a:off x="9006840" y="4507992"/>
-            <a:ext cx="82296" cy="82296"/>
-          </a:xfrm>
-          <a:prstGeom prst="ellipse">
-            <a:avLst/>
-          </a:prstGeom>
-          <a:solidFill>
-            <a:srgbClr val="990011"/>
-          </a:solidFill>
-          <a:ln/>
-        </p:spPr>
-        <p:txBody>
-          <a:bodyPr/>
-          <a:lstStyle/>
-          <a:p>
-            <a:endParaRPr lang="en-IN"/>
-          </a:p>
-        </p:txBody>
-      </p:sp>
-      <p:sp>
-        <p:nvSpPr>
-          <p:cNvPr id="14" name="Text 11"/>
-          <p:cNvSpPr/>
-          <p:nvPr/>
-        </p:nvSpPr>
-        <p:spPr>
-          <a:xfrm>
-            <a:off x="9189720" y="4128234"/>
-            <a:ext cx="2423160" cy="822960"/>
-          </a:xfrm>
-          <a:prstGeom prst="rect">
-            <a:avLst/>
-          </a:prstGeom>
-          <a:noFill/>
-          <a:ln/>
-        </p:spPr>
-        <p:txBody>
-          <a:bodyPr wrap="square" lIns="0" tIns="0" rIns="0" bIns="0" rtlCol="0" anchor="ctr"/>
-          <a:lstStyle/>
-          <a:p>
-            <a:pPr marL="0" indent="0">
-              <a:buNone/>
-            </a:pPr>
-            <a:r>
-              <a:rPr lang="en-US" sz="1150" b="1" dirty="0">
-                <a:solidFill>
-                  <a:srgbClr val="FCF6F5"/>
-                </a:solidFill>
-                <a:latin typeface="Calibri" pitchFamily="34" charset="0"/>
-                <a:ea typeface="Calibri" pitchFamily="34" charset="-122"/>
-                <a:cs typeface="Calibri" pitchFamily="34" charset="-120"/>
-              </a:rPr>
-              <a:t>Overtime analysis</a:t>
-            </a:r>
-            <a:endParaRPr lang="en-US" sz="1150" b="1" dirty="0"/>
-          </a:p>
-        </p:txBody>
-      </p:sp>
-      <p:sp>
-        <p:nvSpPr>
-          <p:cNvPr id="15" name="Text 12"/>
-          <p:cNvSpPr/>
-          <p:nvPr/>
-        </p:nvSpPr>
-        <p:spPr>
-          <a:xfrm>
-            <a:off x="11521440" y="6492240"/>
-            <a:ext cx="457200" cy="274320"/>
-          </a:xfrm>
-          <a:prstGeom prst="rect">
-            <a:avLst/>
-          </a:prstGeom>
-          <a:noFill/>
-          <a:ln/>
-        </p:spPr>
-        <p:txBody>
-          <a:bodyPr wrap="square" rtlCol="0" anchor="ctr"/>
-          <a:lstStyle/>
-          <a:p>
-            <a:pPr marL="0" indent="0" algn="r">
-              <a:buNone/>
-            </a:pPr>
-            <a:r>
-              <a:rPr lang="en-US" sz="1000" dirty="0">
-                <a:solidFill>
-                  <a:srgbClr val="6B6B6B"/>
-                </a:solidFill>
-                <a:latin typeface="Calibri" pitchFamily="34" charset="0"/>
-                <a:ea typeface="Calibri" pitchFamily="34" charset="-122"/>
-                <a:cs typeface="Calibri" pitchFamily="34" charset="-120"/>
-              </a:rPr>
-              <a:t>7</a:t>
-            </a:r>
-            <a:endParaRPr lang="en-US" sz="1000" dirty="0"/>
-          </a:p>
-        </p:txBody>
-      </p:sp>
-      <p:sp>
-        <p:nvSpPr>
-          <p:cNvPr id="16" name="Text 13"/>
-          <p:cNvSpPr/>
-          <p:nvPr/>
-        </p:nvSpPr>
-        <p:spPr>
-          <a:xfrm>
-            <a:off x="457200" y="6492240"/>
-            <a:ext cx="5486400" cy="274320"/>
-          </a:xfrm>
-          <a:prstGeom prst="rect">
-            <a:avLst/>
-          </a:prstGeom>
-          <a:noFill/>
-          <a:ln/>
-        </p:spPr>
-        <p:txBody>
-          <a:bodyPr wrap="square" rtlCol="0" anchor="ctr"/>
-          <a:lstStyle/>
-          <a:p>
-            <a:pPr marL="0" indent="0">
-              <a:buNone/>
-            </a:pPr>
-            <a:r>
-              <a:rPr lang="en-US" sz="1000" dirty="0">
-                <a:solidFill>
-                  <a:srgbClr val="6B6B6B"/>
-                </a:solidFill>
-                <a:latin typeface="Calibri" pitchFamily="34" charset="0"/>
-                <a:ea typeface="Calibri" pitchFamily="34" charset="-122"/>
-                <a:cs typeface="Calibri" pitchFamily="34" charset="-120"/>
-              </a:rPr>
-              <a:t>HR Employee Analytics Dashboard</a:t>
-            </a:r>
-            <a:endParaRPr lang="en-US" sz="1000" dirty="0"/>
-          </a:p>
-        </p:txBody>
-      </p:sp>
     </p:spTree>
   </p:cSld>
   <p:clrMapOvr>

--- a/HR Employee Analytics Dashboard Presentation.pptx
+++ b/HR Employee Analytics Dashboard Presentation.pptx
@@ -1448,7 +1448,7 @@
               <a:buNone/>
             </a:pPr>
             <a:r>
-              <a:rPr lang="en-US" sz="3800" b="1" kern="0" spc="100" dirty="0">
+              <a:rPr lang="en-US" sz="2800" b="1" kern="0" spc="100" dirty="0">
                 <a:solidFill>
                   <a:srgbClr val="FCF6F5"/>
                 </a:solidFill>
@@ -1456,9 +1456,9 @@
                 <a:ea typeface="Cambria" pitchFamily="34" charset="-122"/>
                 <a:cs typeface="Cambria" pitchFamily="34" charset="-120"/>
               </a:rPr>
-              <a:t>HR EMPLOYEE ANALYTICS DASHBOARD</a:t>
-            </a:r>
-            <a:endParaRPr lang="en-US" sz="3800" dirty="0"/>
+              <a:t>NEXORA HR EMPLOYEE ANALYTICS DASHBOARD</a:t>
+            </a:r>
+            <a:endParaRPr lang="en-US" sz="2800" dirty="0"/>
           </a:p>
         </p:txBody>
       </p:sp>
@@ -1495,7 +1495,29 @@
                 <a:ea typeface="Calibri" pitchFamily="34" charset="-122"/>
                 <a:cs typeface="Calibri" pitchFamily="34" charset="-120"/>
               </a:rPr>
-              <a:t>A Power BI Project on the IBM HR Employee Attrition Dataset</a:t>
+              <a:t>A Power BI Project on the </a:t>
+            </a:r>
+            <a:r>
+              <a:rPr lang="en-US" sz="1700" i="1" dirty="0" err="1">
+                <a:solidFill>
+                  <a:srgbClr val="CADCE8"/>
+                </a:solidFill>
+                <a:latin typeface="Calibri" pitchFamily="34" charset="0"/>
+                <a:ea typeface="Calibri" pitchFamily="34" charset="-122"/>
+                <a:cs typeface="Calibri" pitchFamily="34" charset="-120"/>
+              </a:rPr>
+              <a:t>Nexora</a:t>
+            </a:r>
+            <a:r>
+              <a:rPr lang="en-US" sz="1700" i="1" dirty="0">
+                <a:solidFill>
+                  <a:srgbClr val="CADCE8"/>
+                </a:solidFill>
+                <a:latin typeface="Calibri" pitchFamily="34" charset="0"/>
+                <a:ea typeface="Calibri" pitchFamily="34" charset="-122"/>
+                <a:cs typeface="Calibri" pitchFamily="34" charset="-120"/>
+              </a:rPr>
+              <a:t> HR Employee Attrition Dataset</a:t>
             </a:r>
             <a:endParaRPr lang="en-US" sz="1700" dirty="0"/>
           </a:p>
@@ -2597,7 +2619,29 @@
                 <a:ea typeface="Calibri" pitchFamily="34" charset="-122"/>
                 <a:cs typeface="Calibri" pitchFamily="34" charset="-120"/>
               </a:rPr>
-              <a:t>Analyze IBM HR attrition data to uncover workforce and attrition trends.</a:t>
+              <a:t>Analyze </a:t>
+            </a:r>
+            <a:r>
+              <a:rPr lang="en-US" sz="1150" dirty="0" err="1">
+                <a:solidFill>
+                  <a:srgbClr val="6B6B6B"/>
+                </a:solidFill>
+                <a:latin typeface="Calibri" pitchFamily="34" charset="0"/>
+                <a:ea typeface="Calibri" pitchFamily="34" charset="-122"/>
+                <a:cs typeface="Calibri" pitchFamily="34" charset="-120"/>
+              </a:rPr>
+              <a:t>Nexora</a:t>
+            </a:r>
+            <a:r>
+              <a:rPr lang="en-US" sz="1150" dirty="0">
+                <a:solidFill>
+                  <a:srgbClr val="6B6B6B"/>
+                </a:solidFill>
+                <a:latin typeface="Calibri" pitchFamily="34" charset="0"/>
+                <a:ea typeface="Calibri" pitchFamily="34" charset="-122"/>
+                <a:cs typeface="Calibri" pitchFamily="34" charset="-120"/>
+              </a:rPr>
+              <a:t> HR attrition data to uncover workforce and attrition trends.</a:t>
             </a:r>
             <a:endParaRPr lang="en-US" sz="1150" dirty="0"/>
           </a:p>
@@ -3811,7 +3855,29 @@
                 <a:ea typeface="Calibri" pitchFamily="34" charset="-122"/>
                 <a:cs typeface="Calibri" pitchFamily="34" charset="-120"/>
               </a:rPr>
-              <a:t>Source: IBM HR Employee Attrition dataset</a:t>
+              <a:t>Source: </a:t>
+            </a:r>
+            <a:r>
+              <a:rPr lang="en-US" sz="1200" i="1" dirty="0" err="1">
+                <a:solidFill>
+                  <a:srgbClr val="6B6B6B"/>
+                </a:solidFill>
+                <a:latin typeface="Calibri" pitchFamily="34" charset="0"/>
+                <a:ea typeface="Calibri" pitchFamily="34" charset="-122"/>
+                <a:cs typeface="Calibri" pitchFamily="34" charset="-120"/>
+              </a:rPr>
+              <a:t>Nexora</a:t>
+            </a:r>
+            <a:r>
+              <a:rPr lang="en-US" sz="1200" i="1" dirty="0">
+                <a:solidFill>
+                  <a:srgbClr val="6B6B6B"/>
+                </a:solidFill>
+                <a:latin typeface="Calibri" pitchFamily="34" charset="0"/>
+                <a:ea typeface="Calibri" pitchFamily="34" charset="-122"/>
+                <a:cs typeface="Calibri" pitchFamily="34" charset="-120"/>
+              </a:rPr>
+              <a:t> HR Employee Attrition dataset</a:t>
             </a:r>
             <a:endParaRPr lang="en-US" sz="1200" dirty="0"/>
           </a:p>
@@ -6215,10 +6281,10 @@
       </p:sp>
       <p:pic>
         <p:nvPicPr>
-          <p:cNvPr id="18" name="Picture 17">
+          <p:cNvPr id="17" name="Picture 16">
             <a:extLst>
               <a:ext uri="{FF2B5EF4-FFF2-40B4-BE49-F238E27FC236}">
-                <a16:creationId xmlns:a16="http://schemas.microsoft.com/office/drawing/2014/main" id="{740AC185-CB98-6439-FEA2-EDE4EFD59C9A}"/>
+                <a16:creationId xmlns:a16="http://schemas.microsoft.com/office/drawing/2014/main" id="{58C9A527-C23A-D4FB-7049-3B7282D344F6}"/>
               </a:ext>
             </a:extLst>
           </p:cNvPr>
@@ -6235,8 +6301,8 @@
         </p:blipFill>
         <p:spPr>
           <a:xfrm>
-            <a:off x="526309" y="1150462"/>
-            <a:ext cx="7880574" cy="4382591"/>
+            <a:off x="561279" y="1126715"/>
+            <a:ext cx="7875735" cy="4430853"/>
           </a:xfrm>
           <a:prstGeom prst="rect">
             <a:avLst/>
@@ -6768,10 +6834,10 @@
       </p:sp>
       <p:pic>
         <p:nvPicPr>
-          <p:cNvPr id="18" name="Picture 17">
+          <p:cNvPr id="17" name="Picture 16">
             <a:extLst>
               <a:ext uri="{FF2B5EF4-FFF2-40B4-BE49-F238E27FC236}">
-                <a16:creationId xmlns:a16="http://schemas.microsoft.com/office/drawing/2014/main" id="{9096A48A-20FF-8A2E-001D-1D7706984174}"/>
+                <a16:creationId xmlns:a16="http://schemas.microsoft.com/office/drawing/2014/main" id="{B59D27E8-D99A-5EB6-C600-EF09B96132EB}"/>
               </a:ext>
             </a:extLst>
           </p:cNvPr>
@@ -6788,8 +6854,8 @@
         </p:blipFill>
         <p:spPr>
           <a:xfrm>
-            <a:off x="548640" y="1131800"/>
-            <a:ext cx="7820919" cy="4398892"/>
+            <a:off x="579120" y="1131800"/>
+            <a:ext cx="7786525" cy="4350943"/>
           </a:xfrm>
           <a:prstGeom prst="rect">
             <a:avLst/>
@@ -7321,10 +7387,10 @@
       </p:sp>
       <p:pic>
         <p:nvPicPr>
-          <p:cNvPr id="18" name="Picture 17">
+          <p:cNvPr id="17" name="Picture 16">
             <a:extLst>
               <a:ext uri="{FF2B5EF4-FFF2-40B4-BE49-F238E27FC236}">
-                <a16:creationId xmlns:a16="http://schemas.microsoft.com/office/drawing/2014/main" id="{E46E7FF0-D170-CF58-8ADB-B1CB1F06C60F}"/>
+                <a16:creationId xmlns:a16="http://schemas.microsoft.com/office/drawing/2014/main" id="{219C2DE9-BBAB-FFAC-CA48-692F3B1B3911}"/>
               </a:ext>
             </a:extLst>
           </p:cNvPr>
@@ -7341,8 +7407,8 @@
         </p:blipFill>
         <p:spPr>
           <a:xfrm>
-            <a:off x="548640" y="1159792"/>
-            <a:ext cx="7876903" cy="4410583"/>
+            <a:off x="579121" y="1159794"/>
+            <a:ext cx="7795446" cy="4355928"/>
           </a:xfrm>
           <a:prstGeom prst="rect">
             <a:avLst/>
